--- a/_implementation-notes/evening-series/FotH Evening Session 10 Slides DRAFT v1.pptx
+++ b/_implementation-notes/evening-series/FotH Evening Session 10 Slides DRAFT v1.pptx
@@ -10,6 +10,7 @@
   <p:sldIdLst>
     <p:sldId id="256" r:id="rId2"/>
     <p:sldId id="287" r:id="rId127"/>
+    <p:sldId id="534" r:id="rId22"/>
     <p:sldId id="288" r:id="rId128"/>
     <p:sldId id="410" r:id="rId129"/>
     <p:sldId id="411" r:id="rId130"/>
@@ -18,7 +19,8 @@
     <p:sldId id="414" r:id="rId133"/>
     <p:sldId id="415" r:id="rId134"/>
     <p:sldId id="416" r:id="rId135"/>
-    <p:sldId id="533" r:id="rId136"/>
+    <p:sldId id="535" r:id="rId23"/>
+    <p:sldId id="536" r:id="rId24"/>
     <p:sldId id="417" r:id="rId137"/>
     <p:sldId id="418" r:id="rId138"/>
   </p:sldIdLst>
@@ -895,14 +897,17 @@
           <a:lstStyle/>
           <a:p>
             <a:r>
-              <a:rPr lang="en-US" sz="1200"/>
               <a:t>S10 · 7:00–7:08 · LEAD: CONTAINER HOLDER</a:t>
             </a:r>
           </a:p>
           <a:p>
             <a:r>
-              <a:rPr lang="en-US" sz="1200"/>
               <a:t>BEATS: 1. Open even quieter than Week 9 — lights low if the room allows. Aaronic blessing. 2. Frame the second run: not a rerun — deeper. 3. Name the senior once, warmly, and move on: 'the words are the same words; they will read from the card, slowly, the same way I did.' No build-up — a spotlight distorts what the slot is meant to form. 4. Container unchanged: pair talk stays in the pair; nothing required — not even the exercise.</a:t>
+            </a:r>
+          </a:p>
+          <a:p>
+            <a:r>
+              <a:t>PAIR LEAD: name the leading pair in the welcome — two leaders hold tonight, and the room will see the evening handed back and forth between them; that is the design. The pair practices the session together beforehand.</a:t>
             </a:r>
           </a:p>
         </p:txBody>
@@ -1251,59 +1256,6 @@
 </p:notes>
 </file>
 
-<file path=ppt/notesSlides/notesSlide134.xml><?xml version="1.0" encoding="utf-8"?>
-<p:notes xmlns:a="http://schemas.openxmlformats.org/drawingml/2006/main" xmlns:r="http://schemas.openxmlformats.org/officeDocument/2006/relationships" xmlns:p="http://schemas.openxmlformats.org/presentationml/2006/main">
-  <p:cSld>
-    <p:spTree>
-      <p:nvGrpSpPr>
-        <p:cNvPr id="1" name=""/>
-        <p:cNvGrpSpPr/>
-        <p:nvPr/>
-      </p:nvGrpSpPr>
-      <p:grpSpPr>
-        <a:xfrm>
-          <a:off x="0" y="0"/>
-          <a:ext cx="0" cy="0"/>
-          <a:chOff x="0" y="0"/>
-          <a:chExt cx="0" cy="0"/>
-        </a:xfrm>
-      </p:grpSpPr>
-      <p:sp>
-        <p:nvSpPr>
-          <p:cNvPr id="2" name="Notes Placeholder 1"/>
-          <p:cNvSpPr>
-            <a:spLocks noGrp="1"/>
-          </p:cNvSpPr>
-          <p:nvPr>
-            <p:ph type="body" idx="1"/>
-          </p:nvPr>
-        </p:nvSpPr>
-        <p:spPr/>
-        <p:txBody>
-          <a:bodyPr/>
-          <a:lstStyle/>
-          <a:p>
-            <a:r>
-              <a:rPr lang="en-US" sz="1200"/>
-              <a:t>S10 · 8:20–8:24 · LEAD: CONTENT PRESENTER</a:t>
-            </a:r>
-          </a:p>
-          <a:p>
-            <a:r>
-              <a:rPr lang="en-US" sz="1200"/>
-              <a:t>BEATS: 1. Card home: morning question, evening note, daily PROAPT, plus two garden-return checks. 2. A missed box is an invitation to return, never a failure. 3. Keep this brief — the room is full; do not try to empty it with more words.</a:t>
-            </a:r>
-          </a:p>
-        </p:txBody>
-      </p:sp>
-    </p:spTree>
-  </p:cSld>
-  <p:clrMapOvr>
-    <a:masterClrMapping/>
-  </p:clrMapOvr>
-</p:notes>
-</file>
-
 <file path=ppt/notesSlides/notesSlide135.xml><?xml version="1.0" encoding="utf-8"?>
 <p:notes xmlns:a="http://schemas.openxmlformats.org/drawingml/2006/main" xmlns:r="http://schemas.openxmlformats.org/officeDocument/2006/relationships" xmlns:p="http://schemas.openxmlformats.org/presentationml/2006/main">
   <p:cSld>
@@ -1404,6 +1356,214 @@
             <a:r>
               <a:rPr lang="en-US" sz="1200"/>
               <a:t>CUES: Stay accessible fifteen minutes after; two-adult rule for any teen. Afterward, a brief specific word of thanks to the senior, separate from the feedback round — leading deep water for the first time costs something; name that it was seen.</a:t>
+            </a:r>
+          </a:p>
+        </p:txBody>
+      </p:sp>
+    </p:spTree>
+  </p:cSld>
+  <p:clrMapOvr>
+    <a:masterClrMapping/>
+  </p:clrMapOvr>
+</p:notes>
+</file>
+
+<file path=ppt/notesSlides/notesSlide14.xml><?xml version="1.0" encoding="utf-8"?>
+<p:notes xmlns:a="http://schemas.openxmlformats.org/drawingml/2006/main" xmlns:p="http://schemas.openxmlformats.org/presentationml/2006/main" xmlns:r="http://schemas.openxmlformats.org/officeDocument/2006/relationships">
+  <p:cSld>
+    <p:spTree>
+      <p:nvGrpSpPr>
+        <p:cNvPr id="1" name=""/>
+        <p:cNvGrpSpPr/>
+        <p:nvPr/>
+      </p:nvGrpSpPr>
+      <p:grpSpPr>
+        <a:xfrm>
+          <a:off x="0" y="0"/>
+          <a:ext cx="0" cy="0"/>
+          <a:chOff x="0" y="0"/>
+          <a:chExt cx="0" cy="0"/>
+        </a:xfrm>
+      </p:grpSpPr>
+      <p:sp>
+        <p:nvSpPr>
+          <p:cNvPr id="2" name="Notes Placeholder 1"/>
+          <p:cNvSpPr>
+            <a:spLocks noGrp="1"/>
+          </p:cNvSpPr>
+          <p:nvPr>
+            <p:ph type="body" idx="1"/>
+          </p:nvPr>
+        </p:nvSpPr>
+        <p:spPr/>
+        <p:txBody>
+          <a:bodyPr/>
+          <a:lstStyle/>
+          <a:p>
+            <a:r>
+              <a:t>S10 · WELCOME · LEAD: CONTAINER HOLDER · GROUNDING — every session opens on this map</a:t>
+            </a:r>
+          </a:p>
+          <a:p>
+            <a:r>
+              <a:t>BEATS:</a:t>
+            </a:r>
+          </a:p>
+          <a:p>
+            <a:r>
+              <a:t>1. Locate tonight on the map, plainly: Session 10 stands in the third box — Connect with God — walked again, teen-led. Each connection makes the next one real (Matt. 22:37–40).</a:t>
+            </a:r>
+          </a:p>
+          <a:p>
+            <a:r>
+              <a:t>2. The four boxes are one journey — each connection makes the next one real — rooted in the two great commandments: love God, love neighbor (Matt 22:37–40).</a:t>
+            </a:r>
+          </a:p>
+          <a:p>
+            <a:r>
+              <a:t>3. This is also the 'where we are on the map' minute the welcome owes any newcomer.</a:t>
+            </a:r>
+          </a:p>
+          <a:p>
+            <a:r>
+              <a:t>CUES: Two minutes at most; then tonight's road.</a:t>
+            </a:r>
+          </a:p>
+        </p:txBody>
+      </p:sp>
+    </p:spTree>
+  </p:cSld>
+  <p:clrMapOvr>
+    <a:masterClrMapping/>
+  </p:clrMapOvr>
+</p:notes>
+</file>
+
+<file path=ppt/notesSlides/notesSlide15.xml><?xml version="1.0" encoding="utf-8"?>
+<p:notes xmlns:a="http://schemas.openxmlformats.org/drawingml/2006/main" xmlns:p="http://schemas.openxmlformats.org/presentationml/2006/main" xmlns:r="http://schemas.openxmlformats.org/officeDocument/2006/relationships">
+  <p:cSld>
+    <p:spTree>
+      <p:nvGrpSpPr>
+        <p:cNvPr id="1" name=""/>
+        <p:cNvGrpSpPr/>
+        <p:nvPr/>
+      </p:nvGrpSpPr>
+      <p:grpSpPr>
+        <a:xfrm>
+          <a:off x="0" y="0"/>
+          <a:ext cx="0" cy="0"/>
+          <a:chOff x="0" y="0"/>
+          <a:chExt cx="0" cy="0"/>
+        </a:xfrm>
+      </p:grpSpPr>
+      <p:sp>
+        <p:nvSpPr>
+          <p:cNvPr id="2" name="Notes Placeholder 1"/>
+          <p:cNvSpPr>
+            <a:spLocks noGrp="1"/>
+          </p:cNvSpPr>
+          <p:nvPr>
+            <p:ph type="body" idx="1"/>
+          </p:nvPr>
+        </p:nvSpPr>
+        <p:spPr/>
+        <p:txBody>
+          <a:bodyPr/>
+          <a:lstStyle/>
+          <a:p>
+            <a:r>
+              <a:t>S10 · COMMISSIONING · LEAD: CONTENT PRESENTER</a:t>
+            </a:r>
+          </a:p>
+          <a:p>
+            <a:r>
+              <a:t>BEATS:</a:t>
+            </a:r>
+          </a:p>
+          <a:p>
+            <a:r>
+              <a:t>1. The sheet on the screen is the sheet in their hands — walk it, don't read it.</a:t>
+            </a:r>
+          </a:p>
+          <a:p>
+            <a:r>
+              <a:t>2. The standing rhythm first: the morning question, the evening journal line — one box per day on the week-grids.</a:t>
+            </a:r>
+          </a:p>
+          <a:p>
+            <a:r>
+              <a:t>3. A missed box is never a failure — it is an invitation to return.</a:t>
+            </a:r>
+          </a:p>
+          <a:p>
+            <a:r>
+              <a:t>CUES: The four parts are the next slide.</a:t>
+            </a:r>
+          </a:p>
+        </p:txBody>
+      </p:sp>
+    </p:spTree>
+  </p:cSld>
+  <p:clrMapOvr>
+    <a:masterClrMapping/>
+  </p:clrMapOvr>
+</p:notes>
+</file>
+
+<file path=ppt/notesSlides/notesSlide16.xml><?xml version="1.0" encoding="utf-8"?>
+<p:notes xmlns:a="http://schemas.openxmlformats.org/drawingml/2006/main" xmlns:p="http://schemas.openxmlformats.org/presentationml/2006/main" xmlns:r="http://schemas.openxmlformats.org/officeDocument/2006/relationships">
+  <p:cSld>
+    <p:spTree>
+      <p:nvGrpSpPr>
+        <p:cNvPr id="1" name=""/>
+        <p:cNvGrpSpPr/>
+        <p:nvPr/>
+      </p:nvGrpSpPr>
+      <p:grpSpPr>
+        <a:xfrm>
+          <a:off x="0" y="0"/>
+          <a:ext cx="0" cy="0"/>
+          <a:chOff x="0" y="0"/>
+          <a:chExt cx="0" cy="0"/>
+        </a:xfrm>
+      </p:grpSpPr>
+      <p:sp>
+        <p:nvSpPr>
+          <p:cNvPr id="2" name="Notes Placeholder 1"/>
+          <p:cNvSpPr>
+            <a:spLocks noGrp="1"/>
+          </p:cNvSpPr>
+          <p:nvPr>
+            <p:ph type="body" idx="1"/>
+          </p:nvPr>
+        </p:nvSpPr>
+        <p:spPr/>
+        <p:txBody>
+          <a:bodyPr/>
+          <a:lstStyle/>
+          <a:p>
+            <a:r>
+              <a:t>S10 · COMMISSIONING · LEAD: CONTENT PRESENTER</a:t>
+            </a:r>
+          </a:p>
+          <a:p>
+            <a:r>
+              <a:t>BEATS:</a:t>
+            </a:r>
+          </a:p>
+          <a:p>
+            <a:r>
+              <a:t>1. The four parts, in order: the homework practice, week one; the end-of-week-one check-in; the homework practice, week two; one sentence of preparation.</a:t>
+            </a:r>
+          </a:p>
+          <a:p>
+            <a:r>
+              <a:t>2. Check-in partners are named aloud before leaving this slide — the sheet has the line to write the name.</a:t>
+            </a:r>
+          </a:p>
+          <a:p>
+            <a:r>
+              <a:t>GUARD: The sheet-walk, not a re-teach.</a:t>
             </a:r>
           </a:p>
         </p:txBody>
@@ -4615,7 +4775,1646 @@
 </p:sld>
 </file>
 
-<file path=ppt/slides/slide126.xml><?xml version="1.0" encoding="utf-8"?>
+<file path=ppt/slides/slide10.xml><?xml version="1.0" encoding="utf-8"?>
+<p:sld xmlns:a="http://schemas.openxmlformats.org/drawingml/2006/main" xmlns:r="http://schemas.openxmlformats.org/officeDocument/2006/relationships" xmlns:p="http://schemas.openxmlformats.org/presentationml/2006/main">
+  <p:cSld>
+    <p:spTree>
+      <p:nvGrpSpPr>
+        <p:cNvPr id="1" name=""/>
+        <p:cNvGrpSpPr/>
+        <p:nvPr/>
+      </p:nvGrpSpPr>
+      <p:grpSpPr>
+        <a:xfrm>
+          <a:off x="0" y="0"/>
+          <a:ext cx="0" cy="0"/>
+          <a:chOff x="0" y="0"/>
+          <a:chExt cx="0" cy="0"/>
+        </a:xfrm>
+      </p:grpSpPr>
+      <p:sp>
+        <p:nvSpPr>
+          <p:cNvPr id="2" name="Rectangle 1"/>
+          <p:cNvSpPr/>
+          <p:nvPr/>
+        </p:nvSpPr>
+        <p:spPr>
+          <a:xfrm>
+            <a:off x="0" y="0"/>
+            <a:ext cx="12191695" cy="6858000"/>
+          </a:xfrm>
+          <a:prstGeom prst="rect">
+            <a:avLst/>
+          </a:prstGeom>
+          <a:solidFill>
+            <a:srgbClr val="FFFFFF"/>
+          </a:solidFill>
+          <a:ln>
+            <a:noFill/>
+          </a:ln>
+        </p:spPr>
+        <p:txBody>
+          <a:bodyPr/>
+          <a:lstStyle/>
+          <a:p>
+            <a:endParaRPr/>
+          </a:p>
+        </p:txBody>
+      </p:sp>
+      <p:sp>
+        <p:nvSpPr>
+          <p:cNvPr id="3" name="TextBox 2"/>
+          <p:cNvSpPr txBox="1"/>
+          <p:nvPr/>
+        </p:nvSpPr>
+        <p:spPr>
+          <a:xfrm>
+            <a:off x="822960" y="502920"/>
+            <a:ext cx="10515600" cy="822960"/>
+          </a:xfrm>
+          <a:prstGeom prst="rect">
+            <a:avLst/>
+          </a:prstGeom>
+          <a:noFill/>
+        </p:spPr>
+        <p:txBody>
+          <a:bodyPr wrap="square">
+            <a:spAutoFit/>
+          </a:bodyPr>
+          <a:lstStyle/>
+          <a:p>
+            <a:pPr algn="l">
+              <a:spcAft>
+                <a:spcPts val="600"/>
+              </a:spcAft>
+            </a:pPr>
+            <a:r>
+              <a:rPr sz="2800" b="1" i="0">
+                <a:solidFill>
+                  <a:srgbClr val="2C5F2D"/>
+                </a:solidFill>
+                <a:latin typeface="Cambria"/>
+              </a:rPr>
+              <a:t>Homework — Two Weeks, Four Parts</a:t>
+            </a:r>
+          </a:p>
+        </p:txBody>
+      </p:sp>
+      <p:sp>
+        <p:nvSpPr>
+          <p:cNvPr id="4" name="TextBox 4"/>
+          <p:cNvSpPr txBox="1"/>
+          <p:nvPr/>
+        </p:nvSpPr>
+        <p:spPr>
+          <a:xfrm>
+            <a:off x="822960" y="1554480"/>
+            <a:ext cx="6675120" cy="4892040"/>
+          </a:xfrm>
+          <a:prstGeom prst="rect">
+            <a:avLst/>
+          </a:prstGeom>
+          <a:noFill/>
+        </p:spPr>
+        <p:txBody>
+          <a:bodyPr wrap="square" lIns="91440" tIns="91440" rIns="91440" bIns="91440"/>
+          <a:lstStyle/>
+          <a:p>
+            <a:pPr marL="274320" indent="-274320">
+              <a:spcAft>
+                <a:spcPts val="900"/>
+              </a:spcAft>
+            </a:pPr>
+            <a:r>
+              <a:rPr sz="2200" b="1" i="0">
+                <a:solidFill>
+                  <a:srgbClr val="97BC62"/>
+                </a:solidFill>
+                <a:latin typeface="Calibri"/>
+              </a:rPr>
+              <a:t>•  </a:t>
+            </a:r>
+            <a:r>
+              <a:rPr sz="2200" b="0" i="0">
+                <a:solidFill>
+                  <a:srgbClr val="222B22"/>
+                </a:solidFill>
+                <a:latin typeface="Calibri"/>
+              </a:rPr>
+              <a:t>Keep the garden rhythm — two returns this week, five to ten minutes each</a:t>
+            </a:r>
+          </a:p>
+          <a:p>
+            <a:pPr marL="274320" indent="-274320">
+              <a:spcAft>
+                <a:spcPts val="900"/>
+              </a:spcAft>
+            </a:pPr>
+            <a:r>
+              <a:rPr sz="2200" b="1" i="0">
+                <a:solidFill>
+                  <a:srgbClr val="97BC62"/>
+                </a:solidFill>
+                <a:latin typeface="Calibri"/>
+              </a:rPr>
+              <a:t>•  </a:t>
+            </a:r>
+            <a:r>
+              <a:rPr sz="2200" b="0" i="0">
+                <a:solidFill>
+                  <a:srgbClr val="222B22"/>
+                </a:solidFill>
+                <a:latin typeface="Calibri"/>
+              </a:rPr>
+              <a:t>“You know the way now — you don’t need the script.” Go back, walk a little, notice where He is</a:t>
+            </a:r>
+          </a:p>
+          <a:p>
+            <a:pPr marL="274320" indent="-274320">
+              <a:spcAft>
+                <a:spcPts val="900"/>
+              </a:spcAft>
+            </a:pPr>
+            <a:r>
+              <a:rPr sz="2200" b="1" i="0">
+                <a:solidFill>
+                  <a:srgbClr val="97BC62"/>
+                </a:solidFill>
+                <a:latin typeface="Calibri"/>
+              </a:rPr>
+              <a:t>•  </a:t>
+            </a:r>
+            <a:r>
+              <a:rPr sz="2200" b="0" i="0">
+                <a:solidFill>
+                  <a:srgbClr val="222B22"/>
+                </a:solidFill>
+                <a:latin typeface="Calibri"/>
+              </a:rPr>
+              <a:t>Journal each visit — even two sentences — “the garden speaks slowly, and the journal is how you hear it across weeks”</a:t>
+            </a:r>
+          </a:p>
+          <a:p>
+            <a:pPr marL="274320" indent="-274320">
+              <a:spcAft>
+                <a:spcPts val="900"/>
+              </a:spcAft>
+            </a:pPr>
+            <a:r>
+              <a:rPr sz="2200" b="1" i="0">
+                <a:solidFill>
+                  <a:srgbClr val="97BC62"/>
+                </a:solidFill>
+                <a:latin typeface="Calibri"/>
+              </a:rPr>
+              <a:t>•  </a:t>
+            </a:r>
+            <a:r>
+              <a:rPr sz="2200" b="0" i="0">
+                <a:solidFill>
+                  <a:srgbClr val="222B22"/>
+                </a:solidFill>
+                <a:latin typeface="Calibri"/>
+              </a:rPr>
+              <a:t>If a return surfaces something heavy — stop, open your eyes, come back another day; tell a trusted adult</a:t>
+            </a:r>
+          </a:p>
+          <a:p>
+            <a:pPr marL="274320" indent="-274320">
+              <a:spcAft>
+                <a:spcPts val="900"/>
+              </a:spcAft>
+            </a:pPr>
+            <a:r>
+              <a:rPr sz="2200" b="1" i="0">
+                <a:solidFill>
+                  <a:srgbClr val="97BC62"/>
+                </a:solidFill>
+                <a:latin typeface="Calibri"/>
+              </a:rPr>
+              <a:t>•  </a:t>
+            </a:r>
+            <a:r>
+              <a:rPr sz="2200" b="0" i="0">
+                <a:solidFill>
+                  <a:srgbClr val="222B22"/>
+                </a:solidFill>
+                <a:latin typeface="Calibri"/>
+              </a:rPr>
+              <a:t>Three visits drops to two on purpose — a rhythm that survives, not a sprint that impresses</a:t>
+            </a:r>
+          </a:p>
+        </p:txBody>
+      </p:sp>
+      <p:sp>
+        <p:nvSpPr>
+          <p:cNvPr id="90" name="SlideNum"/>
+          <p:cNvSpPr txBox="1"/>
+          <p:nvPr/>
+        </p:nvSpPr>
+        <p:spPr>
+          <a:xfrm>
+            <a:off x="11384280" y="6446520"/>
+            <a:ext cx="640080" cy="292608"/>
+          </a:xfrm>
+          <a:prstGeom prst="rect">
+            <a:avLst/>
+          </a:prstGeom>
+          <a:noFill/>
+        </p:spPr>
+        <p:txBody>
+          <a:bodyPr wrap="none" lIns="0" tIns="0" rIns="45720" bIns="0" anchor="ctr"/>
+          <a:lstStyle/>
+          <a:p>
+            <a:pPr algn="r"/>
+            <a:r>
+              <a:t>134</a:t>
+            </a:r>
+            <a:endParaRPr sz="1000" b="1">
+              <a:solidFill>
+                <a:srgbClr val="7A8A6E"/>
+              </a:solidFill>
+              <a:latin typeface="Calibri"/>
+            </a:endParaRPr>
+          </a:p>
+        </p:txBody>
+      </p:sp>
+      <p:pic>
+        <p:nvPicPr>
+          <p:cNvPr id="33" name="Picture 33" descr="seedling - what grows between Wednesdays"/>
+          <p:cNvPicPr>
+            <a:picLocks noChangeAspect="1"/>
+          </p:cNvPicPr>
+          <p:nvPr/>
+        </p:nvPicPr>
+        <p:blipFill>
+          <a:blip r:embed="rId3"/>
+          <a:stretch>
+            <a:fillRect/>
+          </a:stretch>
+        </p:blipFill>
+        <p:spPr>
+          <a:xfrm>
+            <a:off x="8103612" y="1463040"/>
+            <a:ext cx="3262379" cy="4892040"/>
+          </a:xfrm>
+          <a:prstGeom prst="rect">
+            <a:avLst/>
+          </a:prstGeom>
+          <a:ln w="76200">
+            <a:solidFill>
+              <a:srgbClr val="FFFFFF"/>
+            </a:solidFill>
+          </a:ln>
+          <a:effectLst>
+            <a:outerShdw blurRad="63500" dist="25400" dir="5400000" rotWithShape="0">
+              <a:srgbClr val="000000">
+                <a:alpha val="35000"/>
+              </a:srgbClr>
+            </a:outerShdw>
+          </a:effectLst>
+        </p:spPr>
+      </p:pic>
+    </p:spTree>
+  </p:cSld>
+  <p:clrMapOvr>
+    <a:masterClrMapping/>
+  </p:clrMapOvr>
+</p:sld>
+</file>
+
+<file path=ppt/slides/slide12.xml><?xml version="1.0" encoding="utf-8"?>
+<p:sld xmlns:a="http://schemas.openxmlformats.org/drawingml/2006/main" xmlns:r="http://schemas.openxmlformats.org/officeDocument/2006/relationships" xmlns:p="http://schemas.openxmlformats.org/presentationml/2006/main">
+  <p:cSld>
+    <p:spTree>
+      <p:nvGrpSpPr>
+        <p:cNvPr id="1" name=""/>
+        <p:cNvGrpSpPr/>
+        <p:nvPr/>
+      </p:nvGrpSpPr>
+      <p:grpSpPr>
+        <a:xfrm>
+          <a:off x="0" y="0"/>
+          <a:ext cx="0" cy="0"/>
+          <a:chOff x="0" y="0"/>
+          <a:chExt cx="0" cy="0"/>
+        </a:xfrm>
+      </p:grpSpPr>
+      <p:sp>
+        <p:nvSpPr>
+          <p:cNvPr id="2" name="Rectangle 1"/>
+          <p:cNvSpPr/>
+          <p:nvPr/>
+        </p:nvSpPr>
+        <p:spPr>
+          <a:xfrm>
+            <a:off x="0" y="0"/>
+            <a:ext cx="12191695" cy="6858000"/>
+          </a:xfrm>
+          <a:prstGeom prst="rect">
+            <a:avLst/>
+          </a:prstGeom>
+          <a:solidFill>
+            <a:srgbClr val="FFFFFF"/>
+          </a:solidFill>
+          <a:ln>
+            <a:noFill/>
+          </a:ln>
+        </p:spPr>
+        <p:txBody>
+          <a:bodyPr/>
+          <a:lstStyle/>
+          <a:p>
+            <a:endParaRPr/>
+          </a:p>
+        </p:txBody>
+      </p:sp>
+      <p:sp>
+        <p:nvSpPr>
+          <p:cNvPr id="3" name="TextBox 2"/>
+          <p:cNvSpPr txBox="1"/>
+          <p:nvPr/>
+        </p:nvSpPr>
+        <p:spPr>
+          <a:xfrm>
+            <a:off x="822960" y="502920"/>
+            <a:ext cx="10515600" cy="822960"/>
+          </a:xfrm>
+          <a:prstGeom prst="rect">
+            <a:avLst/>
+          </a:prstGeom>
+          <a:noFill/>
+        </p:spPr>
+        <p:txBody>
+          <a:bodyPr wrap="square">
+            <a:spAutoFit/>
+          </a:bodyPr>
+          <a:lstStyle/>
+          <a:p>
+            <a:pPr algn="l">
+              <a:spcAft>
+                <a:spcPts val="600"/>
+              </a:spcAft>
+            </a:pPr>
+            <a:r>
+              <a:rPr sz="2800" b="1" i="0">
+                <a:solidFill>
+                  <a:srgbClr val="2C5F2D"/>
+                </a:solidFill>
+                <a:latin typeface="Cambria"/>
+              </a:rPr>
+              <a:t>The Leader Feedback Round</a:t>
+            </a:r>
+          </a:p>
+        </p:txBody>
+      </p:sp>
+      <p:sp>
+        <p:nvSpPr>
+          <p:cNvPr id="4" name="TextBox 4"/>
+          <p:cNvSpPr txBox="1"/>
+          <p:nvPr/>
+        </p:nvSpPr>
+        <p:spPr>
+          <a:xfrm>
+            <a:off x="822960" y="1554480"/>
+            <a:ext cx="6675120" cy="4892040"/>
+          </a:xfrm>
+          <a:prstGeom prst="rect">
+            <a:avLst/>
+          </a:prstGeom>
+          <a:noFill/>
+        </p:spPr>
+        <p:txBody>
+          <a:bodyPr wrap="square" lIns="91440" tIns="91440" rIns="91440" bIns="91440"/>
+          <a:lstStyle/>
+          <a:p>
+            <a:pPr marL="274320" indent="-274320">
+              <a:spcAft>
+                <a:spcPts val="900"/>
+              </a:spcAft>
+            </a:pPr>
+            <a:r>
+              <a:rPr sz="2800" b="1" i="0">
+                <a:solidFill>
+                  <a:srgbClr val="97BC62"/>
+                </a:solidFill>
+                <a:latin typeface="Calibri"/>
+              </a:rPr>
+              <a:t>•  </a:t>
+            </a:r>
+            <a:r>
+              <a:rPr sz="2800" b="0" i="0">
+                <a:solidFill>
+                  <a:srgbClr val="222B22"/>
+                </a:solidFill>
+                <a:latin typeface="Calibri"/>
+              </a:rPr>
+              <a:t>Two rounds, same as every session — the container holder first, then the content presenter: three things each</a:t>
+            </a:r>
+          </a:p>
+          <a:p>
+            <a:pPr marL="685800" indent="-274320">
+              <a:spcAft>
+                <a:spcPts val="700"/>
+              </a:spcAft>
+            </a:pPr>
+            <a:r>
+              <a:rPr sz="2000" b="1" i="0">
+                <a:solidFill>
+                  <a:srgbClr val="97BC62"/>
+                </a:solidFill>
+                <a:latin typeface="Calibri"/>
+              </a:rPr>
+              <a:t>–  </a:t>
+            </a:r>
+            <a:r>
+              <a:rPr sz="2000" b="0" i="1">
+                <a:solidFill>
+                  <a:srgbClr val="222B22"/>
+                </a:solidFill>
+                <a:latin typeface="Calibri"/>
+              </a:rPr>
+              <a:t>“What I think went well tonight: ______”</a:t>
+            </a:r>
+          </a:p>
+          <a:p>
+            <a:pPr marL="685800" indent="-274320">
+              <a:spcAft>
+                <a:spcPts val="700"/>
+              </a:spcAft>
+            </a:pPr>
+            <a:r>
+              <a:rPr sz="2000" b="1" i="0">
+                <a:solidFill>
+                  <a:srgbClr val="97BC62"/>
+                </a:solidFill>
+                <a:latin typeface="Calibri"/>
+              </a:rPr>
+              <a:t>–  </a:t>
+            </a:r>
+            <a:r>
+              <a:rPr sz="2000" b="0" i="1">
+                <a:solidFill>
+                  <a:srgbClr val="222B22"/>
+                </a:solidFill>
+                <a:latin typeface="Calibri"/>
+              </a:rPr>
+              <a:t>“What I’d do differently next time: ______”</a:t>
+            </a:r>
+          </a:p>
+          <a:p>
+            <a:pPr marL="685800" indent="-274320">
+              <a:spcAft>
+                <a:spcPts val="700"/>
+              </a:spcAft>
+            </a:pPr>
+            <a:r>
+              <a:rPr sz="2000" b="1" i="0">
+                <a:solidFill>
+                  <a:srgbClr val="97BC62"/>
+                </a:solidFill>
+                <a:latin typeface="Calibri"/>
+              </a:rPr>
+              <a:t>–  </a:t>
+            </a:r>
+            <a:r>
+              <a:rPr sz="2000" b="0" i="1">
+                <a:solidFill>
+                  <a:srgbClr val="222B22"/>
+                </a:solidFill>
+                <a:latin typeface="Calibri"/>
+              </a:rPr>
+              <a:t>“If I were to teach tonight’s process to someone, I would tell them: ______”</a:t>
+            </a:r>
+          </a:p>
+          <a:p>
+            <a:pPr marL="274320" indent="-274320">
+              <a:spcAft>
+                <a:spcPts val="900"/>
+              </a:spcAft>
+            </a:pPr>
+            <a:r>
+              <a:rPr sz="2800" b="1" i="0">
+                <a:solidFill>
+                  <a:srgbClr val="97BC62"/>
+                </a:solidFill>
+                <a:latin typeface="Calibri"/>
+              </a:rPr>
+              <a:t>•  </a:t>
+            </a:r>
+            <a:r>
+              <a:rPr sz="2800" b="0" i="0">
+                <a:solidFill>
+                  <a:srgbClr val="222B22"/>
+                </a:solidFill>
+                <a:latin typeface="Calibri"/>
+              </a:rPr>
+              <a:t>Then the room — the same two questions about tonight</a:t>
+            </a:r>
+          </a:p>
+          <a:p>
+            <a:pPr marL="274320" indent="-274320">
+              <a:spcAft>
+                <a:spcPts val="900"/>
+              </a:spcAft>
+            </a:pPr>
+            <a:r>
+              <a:rPr sz="2800" b="1" i="0">
+                <a:solidFill>
+                  <a:srgbClr val="97BC62"/>
+                </a:solidFill>
+                <a:latin typeface="Calibri"/>
+              </a:rPr>
+              <a:t>•  </a:t>
+            </a:r>
+            <a:r>
+              <a:rPr sz="2800" b="0" i="0">
+                <a:solidFill>
+                  <a:srgbClr val="222B22"/>
+                </a:solidFill>
+                <a:latin typeface="Calibri"/>
+              </a:rPr>
+              <a:t>The leaders receive without defending — “thank you” is the whole response</a:t>
+            </a:r>
+          </a:p>
+        </p:txBody>
+      </p:sp>
+      <p:sp>
+        <p:nvSpPr>
+          <p:cNvPr id="90" name="SlideNum"/>
+          <p:cNvSpPr txBox="1"/>
+          <p:nvPr/>
+        </p:nvSpPr>
+        <p:spPr>
+          <a:xfrm>
+            <a:off x="11384280" y="6446520"/>
+            <a:ext cx="640080" cy="292608"/>
+          </a:xfrm>
+          <a:prstGeom prst="rect">
+            <a:avLst/>
+          </a:prstGeom>
+          <a:noFill/>
+        </p:spPr>
+        <p:txBody>
+          <a:bodyPr wrap="none" lIns="0" tIns="0" rIns="45720" bIns="0" anchor="ctr"/>
+          <a:lstStyle/>
+          <a:p>
+            <a:pPr algn="r"/>
+            <a:r>
+              <a:t>136</a:t>
+            </a:r>
+            <a:endParaRPr sz="1000" b="1">
+              <a:solidFill>
+                <a:srgbClr val="7A8A6E"/>
+              </a:solidFill>
+              <a:latin typeface="Calibri"/>
+            </a:endParaRPr>
+          </a:p>
+        </p:txBody>
+      </p:sp>
+      <p:pic>
+        <p:nvPicPr>
+          <p:cNvPr id="33" name="Picture 33" descr="compass on the trail - the weekly bearing check"/>
+          <p:cNvPicPr>
+            <a:picLocks noChangeAspect="1"/>
+          </p:cNvPicPr>
+          <p:nvPr/>
+        </p:nvPicPr>
+        <p:blipFill>
+          <a:blip r:embed="rId3"/>
+          <a:stretch>
+            <a:fillRect/>
+          </a:stretch>
+        </p:blipFill>
+        <p:spPr>
+          <a:xfrm>
+            <a:off x="8106160" y="1463040"/>
+            <a:ext cx="3259831" cy="4892040"/>
+          </a:xfrm>
+          <a:prstGeom prst="rect">
+            <a:avLst/>
+          </a:prstGeom>
+          <a:ln w="76200">
+            <a:solidFill>
+              <a:srgbClr val="FFFFFF"/>
+            </a:solidFill>
+          </a:ln>
+          <a:effectLst>
+            <a:outerShdw blurRad="63500" dist="25400" dir="5400000" rotWithShape="0">
+              <a:srgbClr val="000000">
+                <a:alpha val="35000"/>
+              </a:srgbClr>
+            </a:outerShdw>
+          </a:effectLst>
+        </p:spPr>
+      </p:pic>
+    </p:spTree>
+  </p:cSld>
+  <p:clrMapOvr>
+    <a:masterClrMapping/>
+  </p:clrMapOvr>
+</p:sld>
+</file>
+
+<file path=ppt/slides/slide13.xml><?xml version="1.0" encoding="utf-8"?>
+<p:sld xmlns:a="http://schemas.openxmlformats.org/drawingml/2006/main" xmlns:r="http://schemas.openxmlformats.org/officeDocument/2006/relationships" xmlns:p="http://schemas.openxmlformats.org/presentationml/2006/main">
+  <p:cSld>
+    <p:spTree>
+      <p:nvGrpSpPr>
+        <p:cNvPr id="1" name=""/>
+        <p:cNvGrpSpPr/>
+        <p:nvPr/>
+      </p:nvGrpSpPr>
+      <p:grpSpPr>
+        <a:xfrm>
+          <a:off x="0" y="0"/>
+          <a:ext cx="0" cy="0"/>
+          <a:chOff x="0" y="0"/>
+          <a:chExt cx="0" cy="0"/>
+        </a:xfrm>
+      </p:grpSpPr>
+      <p:sp>
+        <p:nvSpPr>
+          <p:cNvPr id="2" name="Rectangle 1"/>
+          <p:cNvSpPr/>
+          <p:nvPr/>
+        </p:nvSpPr>
+        <p:spPr>
+          <a:xfrm>
+            <a:off x="0" y="0"/>
+            <a:ext cx="12191695" cy="6858000"/>
+          </a:xfrm>
+          <a:prstGeom prst="rect">
+            <a:avLst/>
+          </a:prstGeom>
+          <a:solidFill>
+            <a:srgbClr val="FFFFFF"/>
+          </a:solidFill>
+          <a:ln>
+            <a:noFill/>
+          </a:ln>
+        </p:spPr>
+        <p:txBody>
+          <a:bodyPr/>
+          <a:lstStyle/>
+          <a:p>
+            <a:endParaRPr/>
+          </a:p>
+        </p:txBody>
+      </p:sp>
+      <p:sp>
+        <p:nvSpPr>
+          <p:cNvPr id="3" name="TextBox 2"/>
+          <p:cNvSpPr txBox="1"/>
+          <p:nvPr/>
+        </p:nvSpPr>
+        <p:spPr>
+          <a:xfrm>
+            <a:off x="822960" y="502920"/>
+            <a:ext cx="10515600" cy="822960"/>
+          </a:xfrm>
+          <a:prstGeom prst="rect">
+            <a:avLst/>
+          </a:prstGeom>
+          <a:noFill/>
+        </p:spPr>
+        <p:txBody>
+          <a:bodyPr wrap="square">
+            <a:spAutoFit/>
+          </a:bodyPr>
+          <a:lstStyle/>
+          <a:p>
+            <a:pPr algn="l">
+              <a:spcAft>
+                <a:spcPts val="600"/>
+              </a:spcAft>
+            </a:pPr>
+            <a:r>
+              <a:rPr sz="2800" b="1" i="0">
+                <a:solidFill>
+                  <a:srgbClr val="2C5F2D"/>
+                </a:solidFill>
+                <a:latin typeface="Cambria"/>
+              </a:rPr>
+              <a:t>Closing the Container + Aaronic Blessing</a:t>
+            </a:r>
+          </a:p>
+        </p:txBody>
+      </p:sp>
+      <p:sp>
+        <p:nvSpPr>
+          <p:cNvPr id="4" name="TextBox 4"/>
+          <p:cNvSpPr txBox="1"/>
+          <p:nvPr/>
+        </p:nvSpPr>
+        <p:spPr>
+          <a:xfrm>
+            <a:off x="822960" y="1600200"/>
+            <a:ext cx="5669280" cy="4572000"/>
+          </a:xfrm>
+          <a:prstGeom prst="rect">
+            <a:avLst/>
+          </a:prstGeom>
+          <a:noFill/>
+        </p:spPr>
+        <p:txBody>
+          <a:bodyPr wrap="square" lIns="91440" tIns="91440" rIns="91440" bIns="91440"/>
+          <a:lstStyle/>
+          <a:p>
+            <a:pPr marL="274320" indent="-274320">
+              <a:spcAft>
+                <a:spcPts val="900"/>
+              </a:spcAft>
+            </a:pPr>
+            <a:r>
+              <a:rPr sz="2200" b="1" i="0">
+                <a:solidFill>
+                  <a:srgbClr val="97BC62"/>
+                </a:solidFill>
+                <a:latin typeface="Calibri"/>
+              </a:rPr>
+              <a:t>•  </a:t>
+            </a:r>
+            <a:r>
+              <a:rPr sz="2200" b="0" i="0">
+                <a:solidFill>
+                  <a:srgbClr val="222B22"/>
+                </a:solidFill>
+                <a:latin typeface="Calibri"/>
+              </a:rPr>
+              <a:t>We close the way we opened — the container, six steps:</a:t>
+            </a:r>
+          </a:p>
+          <a:p>
+            <a:pPr marL="685800" indent="-274320">
+              <a:spcAft>
+                <a:spcPts val="700"/>
+              </a:spcAft>
+            </a:pPr>
+            <a:r>
+              <a:rPr sz="2000" b="1" i="0">
+                <a:solidFill>
+                  <a:srgbClr val="97BC62"/>
+                </a:solidFill>
+                <a:latin typeface="Calibri"/>
+              </a:rPr>
+              <a:t>1   </a:t>
+            </a:r>
+            <a:r>
+              <a:rPr sz="2000" b="0" i="0">
+                <a:solidFill>
+                  <a:srgbClr val="222B22"/>
+                </a:solidFill>
+                <a:latin typeface="Calibri"/>
+              </a:rPr>
+              <a:t>Stand again — same circle, same posture as the open</a:t>
+            </a:r>
+          </a:p>
+          <a:p>
+            <a:pPr marL="685800" indent="-274320">
+              <a:spcAft>
+                <a:spcPts val="700"/>
+              </a:spcAft>
+            </a:pPr>
+            <a:r>
+              <a:rPr sz="2000" b="1" i="0">
+                <a:solidFill>
+                  <a:srgbClr val="97BC62"/>
+                </a:solidFill>
+                <a:latin typeface="Calibri"/>
+              </a:rPr>
+              <a:t>2   </a:t>
+            </a:r>
+            <a:r>
+              <a:rPr sz="2000" b="0" i="0">
+                <a:solidFill>
+                  <a:srgbClr val="222B22"/>
+                </a:solidFill>
+                <a:latin typeface="Calibri"/>
+              </a:rPr>
+              <a:t>One-word landing — compare it to your opening word</a:t>
+            </a:r>
+          </a:p>
+          <a:p>
+            <a:pPr marL="685800" indent="-274320">
+              <a:spcAft>
+                <a:spcPts val="700"/>
+              </a:spcAft>
+            </a:pPr>
+            <a:r>
+              <a:rPr sz="2000" b="1" i="0">
+                <a:solidFill>
+                  <a:srgbClr val="97BC62"/>
+                </a:solidFill>
+                <a:latin typeface="Calibri"/>
+              </a:rPr>
+              <a:t>3   </a:t>
+            </a:r>
+            <a:r>
+              <a:rPr sz="2000" b="0" i="0">
+                <a:solidFill>
+                  <a:srgbClr val="222B22"/>
+                </a:solidFill>
+                <a:latin typeface="Calibri"/>
+              </a:rPr>
+              <a:t>The one thing you are taking from tonight</a:t>
+            </a:r>
+          </a:p>
+          <a:p>
+            <a:pPr marL="685800" indent="-274320">
+              <a:spcAft>
+                <a:spcPts val="700"/>
+              </a:spcAft>
+            </a:pPr>
+            <a:r>
+              <a:rPr sz="2000" b="1" i="0">
+                <a:solidFill>
+                  <a:srgbClr val="97BC62"/>
+                </a:solidFill>
+                <a:latin typeface="Calibri"/>
+              </a:rPr>
+              <a:t>4   </a:t>
+            </a:r>
+            <a:r>
+              <a:rPr sz="2000" b="0" i="0">
+                <a:solidFill>
+                  <a:srgbClr val="222B22"/>
+                </a:solidFill>
+                <a:latin typeface="Calibri"/>
+              </a:rPr>
+              <a:t>The one practice — committed aloud, or modified to one you will actually keep</a:t>
+            </a:r>
+          </a:p>
+          <a:p>
+            <a:pPr marL="685800" indent="-274320">
+              <a:spcAft>
+                <a:spcPts val="700"/>
+              </a:spcAft>
+            </a:pPr>
+            <a:r>
+              <a:rPr sz="2000" b="1" i="0">
+                <a:solidFill>
+                  <a:srgbClr val="97BC62"/>
+                </a:solidFill>
+                <a:latin typeface="Calibri"/>
+              </a:rPr>
+              <a:t>5   </a:t>
+            </a:r>
+            <a:r>
+              <a:rPr sz="2000" b="0" i="0">
+                <a:solidFill>
+                  <a:srgbClr val="222B22"/>
+                </a:solidFill>
+                <a:latin typeface="Calibri"/>
+              </a:rPr>
+              <a:t>Blessings — specific, witnessed, short</a:t>
+            </a:r>
+          </a:p>
+          <a:p>
+            <a:pPr marL="685800" indent="-274320">
+              <a:spcAft>
+                <a:spcPts val="700"/>
+              </a:spcAft>
+            </a:pPr>
+            <a:r>
+              <a:rPr sz="2000" b="1" i="0">
+                <a:solidFill>
+                  <a:srgbClr val="97BC62"/>
+                </a:solidFill>
+                <a:latin typeface="Calibri"/>
+              </a:rPr>
+              <a:t>6   </a:t>
+            </a:r>
+            <a:r>
+              <a:rPr sz="2000" b="0" i="0">
+                <a:solidFill>
+                  <a:srgbClr val="222B22"/>
+                </a:solidFill>
+                <a:latin typeface="Calibri"/>
+              </a:rPr>
+              <a:t>Closing prayer — and the Aaronic blessing, spoken over each other, face to face</a:t>
+            </a:r>
+          </a:p>
+        </p:txBody>
+      </p:sp>
+      <p:sp>
+        <p:nvSpPr>
+          <p:cNvPr id="6" name="TextBox 6"/>
+          <p:cNvSpPr txBox="1"/>
+          <p:nvPr/>
+        </p:nvSpPr>
+        <p:spPr>
+          <a:xfrm>
+            <a:off x="6766560" y="1737360"/>
+            <a:ext cx="4663440" cy="2926080"/>
+          </a:xfrm>
+          <a:prstGeom prst="rect">
+            <a:avLst/>
+          </a:prstGeom>
+          <a:solidFill>
+            <a:srgbClr val="F1F6EC"/>
+          </a:solidFill>
+        </p:spPr>
+        <p:txBody>
+          <a:bodyPr wrap="square" lIns="91440" tIns="91440" rIns="91440" bIns="91440" anchor="ctr"/>
+          <a:lstStyle/>
+          <a:p>
+            <a:pPr>
+              <a:spcAft>
+                <a:spcPts val="900"/>
+              </a:spcAft>
+            </a:pPr>
+            <a:r>
+              <a:rPr sz="1200" b="1" i="0">
+                <a:solidFill>
+                  <a:srgbClr val="97BC62"/>
+                </a:solidFill>
+                <a:latin typeface="Calibri"/>
+              </a:rPr>
+              <a:t>THE AARONIC BLESSING — NUMBERS 6:24–26</a:t>
+            </a:r>
+          </a:p>
+          <a:p>
+            <a:pPr>
+              <a:spcAft>
+                <a:spcPts val="600"/>
+              </a:spcAft>
+            </a:pPr>
+            <a:r>
+              <a:rPr sz="2400" b="0" i="1">
+                <a:solidFill>
+                  <a:srgbClr val="222B22"/>
+                </a:solidFill>
+                <a:latin typeface="Cambria"/>
+              </a:rPr>
+              <a:t>“The Lord bless you and keep you;</a:t>
+            </a:r>
+          </a:p>
+          <a:p>
+            <a:pPr>
+              <a:spcAft>
+                <a:spcPts val="600"/>
+              </a:spcAft>
+            </a:pPr>
+            <a:r>
+              <a:rPr sz="2400" b="0" i="1">
+                <a:solidFill>
+                  <a:srgbClr val="222B22"/>
+                </a:solidFill>
+                <a:latin typeface="Cambria"/>
+              </a:rPr>
+              <a:t>the Lord make his face to shine upon you, and be gracious to you;</a:t>
+            </a:r>
+          </a:p>
+          <a:p>
+            <a:pPr>
+              <a:spcAft>
+                <a:spcPts val="600"/>
+              </a:spcAft>
+            </a:pPr>
+            <a:r>
+              <a:rPr sz="2400" b="0" i="1">
+                <a:solidFill>
+                  <a:srgbClr val="222B22"/>
+                </a:solidFill>
+                <a:latin typeface="Cambria"/>
+              </a:rPr>
+              <a:t>the Lord lift up his countenance upon you, and give you peace.”</a:t>
+            </a:r>
+          </a:p>
+        </p:txBody>
+      </p:sp>
+      <p:sp>
+        <p:nvSpPr>
+          <p:cNvPr id="90" name="SlideNum"/>
+          <p:cNvSpPr txBox="1"/>
+          <p:nvPr/>
+        </p:nvSpPr>
+        <p:spPr>
+          <a:xfrm>
+            <a:off x="11384280" y="6446520"/>
+            <a:ext cx="640080" cy="292608"/>
+          </a:xfrm>
+          <a:prstGeom prst="rect">
+            <a:avLst/>
+          </a:prstGeom>
+          <a:noFill/>
+        </p:spPr>
+        <p:txBody>
+          <a:bodyPr wrap="none" lIns="0" tIns="0" rIns="45720" bIns="0" anchor="ctr"/>
+          <a:lstStyle/>
+          <a:p>
+            <a:pPr algn="r"/>
+            <a:r>
+              <a:t>137</a:t>
+            </a:r>
+            <a:endParaRPr sz="1000" b="1">
+              <a:solidFill>
+                <a:srgbClr val="7A8A6E"/>
+              </a:solidFill>
+              <a:latin typeface="Calibri"/>
+            </a:endParaRPr>
+          </a:p>
+        </p:txBody>
+      </p:sp>
+    </p:spTree>
+  </p:cSld>
+  <p:clrMapOvr>
+    <a:masterClrMapping/>
+  </p:clrMapOvr>
+</p:sld>
+</file>
+
+<file path=ppt/slides/slide14.xml><?xml version="1.0" encoding="utf-8"?>
+<p:sld xmlns:a="http://schemas.openxmlformats.org/drawingml/2006/main" xmlns:p="http://schemas.openxmlformats.org/presentationml/2006/main" xmlns:r="http://schemas.openxmlformats.org/officeDocument/2006/relationships">
+  <p:cSld>
+    <p:spTree>
+      <p:nvGrpSpPr>
+        <p:cNvPr id="1" name=""/>
+        <p:cNvGrpSpPr/>
+        <p:nvPr/>
+      </p:nvGrpSpPr>
+      <p:grpSpPr/>
+      <p:sp>
+        <p:nvSpPr>
+          <p:cNvPr id="2" name="Rectangle 1"/>
+          <p:cNvSpPr/>
+          <p:nvPr/>
+        </p:nvSpPr>
+        <p:spPr>
+          <a:xfrm>
+            <a:off x="0" y="0"/>
+            <a:ext cx="12192000" cy="6858000"/>
+          </a:xfrm>
+          <a:prstGeom prst="rect">
+            <a:avLst/>
+          </a:prstGeom>
+          <a:solidFill>
+            <a:srgbClr val="FFFFFF"/>
+          </a:solidFill>
+          <a:ln>
+            <a:noFill/>
+          </a:ln>
+          <a:effectLst/>
+        </p:spPr>
+        <p:style>
+          <a:lnRef idx="1">
+            <a:schemeClr val="accent1"/>
+          </a:lnRef>
+          <a:fillRef idx="3">
+            <a:schemeClr val="accent1"/>
+          </a:fillRef>
+          <a:effectRef idx="2">
+            <a:schemeClr val="accent1"/>
+          </a:effectRef>
+          <a:fontRef idx="minor">
+            <a:schemeClr val="lt1"/>
+          </a:fontRef>
+        </p:style>
+        <p:txBody>
+          <a:bodyPr rtlCol="0" anchor="ctr"/>
+          <a:lstStyle/>
+          <a:p>
+            <a:pPr algn="ctr"/>
+          </a:p>
+        </p:txBody>
+      </p:sp>
+      <p:sp>
+        <p:nvSpPr>
+          <p:cNvPr id="3" name="TextBox 2"/>
+          <p:cNvSpPr txBox="1"/>
+          <p:nvPr/>
+        </p:nvSpPr>
+        <p:spPr>
+          <a:xfrm>
+            <a:off x="822960" y="502920"/>
+            <a:ext cx="10515600" cy="822960"/>
+          </a:xfrm>
+          <a:prstGeom prst="rect">
+            <a:avLst/>
+          </a:prstGeom>
+          <a:noFill/>
+        </p:spPr>
+        <p:txBody>
+          <a:bodyPr wrap="square">
+            <a:spAutoFit/>
+          </a:bodyPr>
+          <a:lstStyle/>
+          <a:p>
+            <a:r>
+              <a:rPr sz="2800" b="1">
+                <a:solidFill>
+                  <a:srgbClr val="2C5F2D"/>
+                </a:solidFill>
+                <a:latin typeface="Cambria"/>
+              </a:rPr>
+              <a:t>Where We Are — the Four Connects</a:t>
+            </a:r>
+          </a:p>
+        </p:txBody>
+      </p:sp>
+      <p:pic>
+        <p:nvPicPr>
+          <p:cNvPr id="4" name="Picture 3" descr="four-connects.png"/>
+          <p:cNvPicPr>
+            <a:picLocks noChangeAspect="1"/>
+          </p:cNvPicPr>
+          <p:nvPr/>
+        </p:nvPicPr>
+        <p:blipFill>
+          <a:blip r:embed="rId2"/>
+          <a:stretch>
+            <a:fillRect/>
+          </a:stretch>
+        </p:blipFill>
+        <p:spPr>
+          <a:xfrm>
+            <a:off x="932688" y="1645920"/>
+            <a:ext cx="10332720" cy="3708663"/>
+          </a:xfrm>
+          <a:prstGeom prst="rect">
+            <a:avLst/>
+          </a:prstGeom>
+        </p:spPr>
+      </p:pic>
+      <p:sp>
+        <p:nvSpPr>
+          <p:cNvPr id="5" name="TextBox 4"/>
+          <p:cNvSpPr txBox="1"/>
+          <p:nvPr/>
+        </p:nvSpPr>
+        <p:spPr>
+          <a:xfrm>
+            <a:off x="822960" y="5623560"/>
+            <a:ext cx="10515600" cy="914400"/>
+          </a:xfrm>
+          <a:prstGeom prst="rect">
+            <a:avLst/>
+          </a:prstGeom>
+          <a:noFill/>
+        </p:spPr>
+        <p:txBody>
+          <a:bodyPr wrap="square">
+            <a:spAutoFit/>
+          </a:bodyPr>
+          <a:lstStyle/>
+          <a:p>
+            <a:r>
+              <a:rPr sz="1800" b="0">
+                <a:solidFill>
+                  <a:srgbClr val="222B22"/>
+                </a:solidFill>
+                <a:latin typeface="Calibri"/>
+              </a:rPr>
+              <a:t>Session 10 stands in the third box — </a:t>
+            </a:r>
+            <a:r>
+              <a:rPr sz="1800" b="1">
+                <a:solidFill>
+                  <a:srgbClr val="2C5F2D"/>
+                </a:solidFill>
+                <a:latin typeface="Calibri"/>
+              </a:rPr>
+              <a:t>Connect with God</a:t>
+            </a:r>
+            <a:r>
+              <a:rPr sz="1800" b="0">
+                <a:solidFill>
+                  <a:srgbClr val="222B22"/>
+                </a:solidFill>
+                <a:latin typeface="Calibri"/>
+              </a:rPr>
+              <a:t> — walked again, teen-led. Each connection makes the next one real (Matt. 22:37–40).</a:t>
+            </a:r>
+          </a:p>
+        </p:txBody>
+      </p:sp>
+      <p:sp>
+        <p:nvSpPr>
+          <p:cNvPr id="90" name="SlideNum"/>
+          <p:cNvSpPr txBox="1"/>
+          <p:nvPr/>
+        </p:nvSpPr>
+        <p:spPr>
+          <a:xfrm>
+            <a:off x="11384280" y="6446520"/>
+            <a:ext cx="640080" cy="292608"/>
+          </a:xfrm>
+          <a:prstGeom prst="rect">
+            <a:avLst/>
+          </a:prstGeom>
+          <a:noFill/>
+        </p:spPr>
+        <p:txBody>
+          <a:bodyPr wrap="none" lIns="0" tIns="0" rIns="45720" bIns="0" anchor="ctr"/>
+          <a:lstStyle/>
+          <a:p>
+            <a:pPr algn="r"/>
+            <a:r>
+              <a:t>126a</a:t>
+            </a:r>
+            <a:endParaRPr sz="1000" b="1">
+              <a:solidFill>
+                <a:srgbClr val="7A8A6E"/>
+              </a:solidFill>
+              <a:latin typeface="Calibri"/>
+            </a:endParaRPr>
+          </a:p>
+        </p:txBody>
+      </p:sp>
+    </p:spTree>
+  </p:cSld>
+  <p:clrMapOvr>
+    <a:masterClrMapping/>
+  </p:clrMapOvr>
+</p:sld>
+</file>
+
+<file path=ppt/slides/slide15.xml><?xml version="1.0" encoding="utf-8"?>
+<p:sld xmlns:a="http://schemas.openxmlformats.org/drawingml/2006/main" xmlns:p="http://schemas.openxmlformats.org/presentationml/2006/main" xmlns:r="http://schemas.openxmlformats.org/officeDocument/2006/relationships">
+  <p:cSld>
+    <p:spTree>
+      <p:nvGrpSpPr>
+        <p:cNvPr id="1" name=""/>
+        <p:cNvGrpSpPr/>
+        <p:nvPr/>
+      </p:nvGrpSpPr>
+      <p:grpSpPr/>
+      <p:sp>
+        <p:nvSpPr>
+          <p:cNvPr id="2" name="Rectangle 1"/>
+          <p:cNvSpPr/>
+          <p:nvPr/>
+        </p:nvSpPr>
+        <p:spPr>
+          <a:xfrm>
+            <a:off x="0" y="0"/>
+            <a:ext cx="12192000" cy="6858000"/>
+          </a:xfrm>
+          <a:prstGeom prst="rect">
+            <a:avLst/>
+          </a:prstGeom>
+          <a:solidFill>
+            <a:srgbClr val="FFFFFF"/>
+          </a:solidFill>
+          <a:ln>
+            <a:noFill/>
+          </a:ln>
+          <a:effectLst/>
+        </p:spPr>
+        <p:style>
+          <a:lnRef idx="1">
+            <a:schemeClr val="accent1"/>
+          </a:lnRef>
+          <a:fillRef idx="3">
+            <a:schemeClr val="accent1"/>
+          </a:fillRef>
+          <a:effectRef idx="2">
+            <a:schemeClr val="accent1"/>
+          </a:effectRef>
+          <a:fontRef idx="minor">
+            <a:schemeClr val="lt1"/>
+          </a:fontRef>
+        </p:style>
+        <p:txBody>
+          <a:bodyPr rtlCol="0" anchor="ctr"/>
+          <a:lstStyle/>
+          <a:p>
+            <a:pPr algn="ctr"/>
+          </a:p>
+        </p:txBody>
+      </p:sp>
+      <p:sp>
+        <p:nvSpPr>
+          <p:cNvPr id="3" name="TextBox 2"/>
+          <p:cNvSpPr txBox="1"/>
+          <p:nvPr/>
+        </p:nvSpPr>
+        <p:spPr>
+          <a:xfrm>
+            <a:off x="822960" y="502920"/>
+            <a:ext cx="10515600" cy="822960"/>
+          </a:xfrm>
+          <a:prstGeom prst="rect">
+            <a:avLst/>
+          </a:prstGeom>
+          <a:noFill/>
+        </p:spPr>
+        <p:txBody>
+          <a:bodyPr wrap="square">
+            <a:spAutoFit/>
+          </a:bodyPr>
+          <a:lstStyle/>
+          <a:p>
+            <a:r>
+              <a:rPr sz="2800" b="1">
+                <a:solidFill>
+                  <a:srgbClr val="2C5F2D"/>
+                </a:solidFill>
+                <a:latin typeface="Cambria"/>
+              </a:rPr>
+              <a:t>The Take-Home Sheet — the Daily Rhythm</a:t>
+            </a:r>
+          </a:p>
+        </p:txBody>
+      </p:sp>
+      <p:pic>
+        <p:nvPicPr>
+          <p:cNvPr id="4" name="Picture 3" descr="s10_part1.png"/>
+          <p:cNvPicPr>
+            <a:picLocks noChangeAspect="1"/>
+          </p:cNvPicPr>
+          <p:nvPr/>
+        </p:nvPicPr>
+        <p:blipFill>
+          <a:blip r:embed="rId2"/>
+          <a:stretch>
+            <a:fillRect/>
+          </a:stretch>
+        </p:blipFill>
+        <p:spPr>
+          <a:xfrm>
+            <a:off x="1798167" y="1463040"/>
+            <a:ext cx="8595360" cy="4457308"/>
+          </a:xfrm>
+          <a:prstGeom prst="rect">
+            <a:avLst/>
+          </a:prstGeom>
+          <a:ln w="12700">
+            <a:solidFill>
+              <a:srgbClr val="C8C8C8"/>
+            </a:solidFill>
+          </a:ln>
+        </p:spPr>
+      </p:pic>
+      <p:sp>
+        <p:nvSpPr>
+          <p:cNvPr id="5" name="TextBox 4"/>
+          <p:cNvSpPr txBox="1"/>
+          <p:nvPr/>
+        </p:nvSpPr>
+        <p:spPr>
+          <a:xfrm>
+            <a:off x="822960" y="6355080"/>
+            <a:ext cx="10515600" cy="411480"/>
+          </a:xfrm>
+          <a:prstGeom prst="rect">
+            <a:avLst/>
+          </a:prstGeom>
+          <a:noFill/>
+        </p:spPr>
+        <p:txBody>
+          <a:bodyPr wrap="square">
+            <a:spAutoFit/>
+          </a:bodyPr>
+          <a:lstStyle/>
+          <a:p>
+            <a:r>
+              <a:rPr sz="1400" i="1">
+                <a:solidFill>
+                  <a:srgbClr val="595959"/>
+                </a:solidFill>
+                <a:latin typeface="Calibri"/>
+              </a:rPr>
+              <a:t>Handed out now — this is the sheet in your hands.</a:t>
+            </a:r>
+          </a:p>
+        </p:txBody>
+      </p:sp>
+      <p:sp>
+        <p:nvSpPr>
+          <p:cNvPr id="90" name="SlideNum"/>
+          <p:cNvSpPr txBox="1"/>
+          <p:nvPr/>
+        </p:nvSpPr>
+        <p:spPr>
+          <a:xfrm>
+            <a:off x="11384280" y="6446520"/>
+            <a:ext cx="640080" cy="292608"/>
+          </a:xfrm>
+          <a:prstGeom prst="rect">
+            <a:avLst/>
+          </a:prstGeom>
+          <a:noFill/>
+        </p:spPr>
+        <p:txBody>
+          <a:bodyPr wrap="none" lIns="0" tIns="0" rIns="45720" bIns="0" anchor="ctr"/>
+          <a:lstStyle/>
+          <a:p>
+            <a:pPr algn="r"/>
+            <a:r>
+              <a:t>135</a:t>
+            </a:r>
+            <a:endParaRPr sz="1000" b="1">
+              <a:solidFill>
+                <a:srgbClr val="7A8A6E"/>
+              </a:solidFill>
+              <a:latin typeface="Calibri"/>
+            </a:endParaRPr>
+          </a:p>
+        </p:txBody>
+      </p:sp>
+    </p:spTree>
+  </p:cSld>
+  <p:clrMapOvr>
+    <a:masterClrMapping/>
+  </p:clrMapOvr>
+</p:sld>
+</file>
+
+<file path=ppt/slides/slide16.xml><?xml version="1.0" encoding="utf-8"?>
+<p:sld xmlns:a="http://schemas.openxmlformats.org/drawingml/2006/main" xmlns:p="http://schemas.openxmlformats.org/presentationml/2006/main" xmlns:r="http://schemas.openxmlformats.org/officeDocument/2006/relationships">
+  <p:cSld>
+    <p:spTree>
+      <p:nvGrpSpPr>
+        <p:cNvPr id="1" name=""/>
+        <p:cNvGrpSpPr/>
+        <p:nvPr/>
+      </p:nvGrpSpPr>
+      <p:grpSpPr/>
+      <p:sp>
+        <p:nvSpPr>
+          <p:cNvPr id="2" name="Rectangle 1"/>
+          <p:cNvSpPr/>
+          <p:nvPr/>
+        </p:nvSpPr>
+        <p:spPr>
+          <a:xfrm>
+            <a:off x="0" y="0"/>
+            <a:ext cx="12192000" cy="6858000"/>
+          </a:xfrm>
+          <a:prstGeom prst="rect">
+            <a:avLst/>
+          </a:prstGeom>
+          <a:solidFill>
+            <a:srgbClr val="FFFFFF"/>
+          </a:solidFill>
+          <a:ln>
+            <a:noFill/>
+          </a:ln>
+          <a:effectLst/>
+        </p:spPr>
+        <p:style>
+          <a:lnRef idx="1">
+            <a:schemeClr val="accent1"/>
+          </a:lnRef>
+          <a:fillRef idx="3">
+            <a:schemeClr val="accent1"/>
+          </a:fillRef>
+          <a:effectRef idx="2">
+            <a:schemeClr val="accent1"/>
+          </a:effectRef>
+          <a:fontRef idx="minor">
+            <a:schemeClr val="lt1"/>
+          </a:fontRef>
+        </p:style>
+        <p:txBody>
+          <a:bodyPr rtlCol="0" anchor="ctr"/>
+          <a:lstStyle/>
+          <a:p>
+            <a:pPr algn="ctr"/>
+          </a:p>
+        </p:txBody>
+      </p:sp>
+      <p:sp>
+        <p:nvSpPr>
+          <p:cNvPr id="3" name="TextBox 2"/>
+          <p:cNvSpPr txBox="1"/>
+          <p:nvPr/>
+        </p:nvSpPr>
+        <p:spPr>
+          <a:xfrm>
+            <a:off x="822960" y="502920"/>
+            <a:ext cx="10515600" cy="822960"/>
+          </a:xfrm>
+          <a:prstGeom prst="rect">
+            <a:avLst/>
+          </a:prstGeom>
+          <a:noFill/>
+        </p:spPr>
+        <p:txBody>
+          <a:bodyPr wrap="square">
+            <a:spAutoFit/>
+          </a:bodyPr>
+          <a:lstStyle/>
+          <a:p>
+            <a:r>
+              <a:rPr sz="2800" b="1">
+                <a:solidFill>
+                  <a:srgbClr val="2C5F2D"/>
+                </a:solidFill>
+                <a:latin typeface="Cambria"/>
+              </a:rPr>
+              <a:t>The Take-Home Sheet — the Four Parts</a:t>
+            </a:r>
+          </a:p>
+        </p:txBody>
+      </p:sp>
+      <p:pic>
+        <p:nvPicPr>
+          <p:cNvPr id="4" name="Picture 3" descr="s10_part2.png"/>
+          <p:cNvPicPr>
+            <a:picLocks noChangeAspect="1"/>
+          </p:cNvPicPr>
+          <p:nvPr/>
+        </p:nvPicPr>
+        <p:blipFill>
+          <a:blip r:embed="rId2"/>
+          <a:stretch>
+            <a:fillRect/>
+          </a:stretch>
+        </p:blipFill>
+        <p:spPr>
+          <a:xfrm>
+            <a:off x="1864253" y="1463040"/>
+            <a:ext cx="8463188" cy="4709160"/>
+          </a:xfrm>
+          <a:prstGeom prst="rect">
+            <a:avLst/>
+          </a:prstGeom>
+          <a:ln w="12700">
+            <a:solidFill>
+              <a:srgbClr val="C8C8C8"/>
+            </a:solidFill>
+          </a:ln>
+        </p:spPr>
+      </p:pic>
+      <p:sp>
+        <p:nvSpPr>
+          <p:cNvPr id="5" name="TextBox 4"/>
+          <p:cNvSpPr txBox="1"/>
+          <p:nvPr/>
+        </p:nvSpPr>
+        <p:spPr>
+          <a:xfrm>
+            <a:off x="822960" y="6355080"/>
+            <a:ext cx="10515600" cy="411480"/>
+          </a:xfrm>
+          <a:prstGeom prst="rect">
+            <a:avLst/>
+          </a:prstGeom>
+          <a:noFill/>
+        </p:spPr>
+        <p:txBody>
+          <a:bodyPr wrap="square">
+            <a:spAutoFit/>
+          </a:bodyPr>
+          <a:lstStyle/>
+          <a:p>
+            <a:r>
+              <a:rPr sz="1400" i="1">
+                <a:solidFill>
+                  <a:srgbClr val="595959"/>
+                </a:solidFill>
+                <a:latin typeface="Calibri"/>
+              </a:rPr>
+              <a:t>One practice at a time — and a partner expecting you at the end of week one.</a:t>
+            </a:r>
+          </a:p>
+        </p:txBody>
+      </p:sp>
+      <p:sp>
+        <p:nvSpPr>
+          <p:cNvPr id="90" name="SlideNum"/>
+          <p:cNvSpPr txBox="1"/>
+          <p:nvPr/>
+        </p:nvSpPr>
+        <p:spPr>
+          <a:xfrm>
+            <a:off x="11384280" y="6446520"/>
+            <a:ext cx="640080" cy="292608"/>
+          </a:xfrm>
+          <a:prstGeom prst="rect">
+            <a:avLst/>
+          </a:prstGeom>
+          <a:noFill/>
+        </p:spPr>
+        <p:txBody>
+          <a:bodyPr wrap="none" lIns="0" tIns="0" rIns="45720" bIns="0" anchor="ctr"/>
+          <a:lstStyle/>
+          <a:p>
+            <a:pPr algn="r"/>
+            <a:r>
+              <a:t>135a</a:t>
+            </a:r>
+            <a:endParaRPr sz="1000" b="1">
+              <a:solidFill>
+                <a:srgbClr val="7A8A6E"/>
+              </a:solidFill>
+              <a:latin typeface="Calibri"/>
+            </a:endParaRPr>
+          </a:p>
+        </p:txBody>
+      </p:sp>
+    </p:spTree>
+  </p:cSld>
+  <p:clrMapOvr>
+    <a:masterClrMapping/>
+  </p:clrMapOvr>
+</p:sld>
+</file>
+
+<file path=ppt/slides/slide2.xml><?xml version="1.0" encoding="utf-8"?>
 <p:sld xmlns:a="http://schemas.openxmlformats.org/drawingml/2006/main" xmlns:r="http://schemas.openxmlformats.org/officeDocument/2006/relationships" xmlns:p="http://schemas.openxmlformats.org/presentationml/2006/main">
   <p:cSld>
     <p:spTree>
@@ -4864,7 +6663,7 @@
 </p:sld>
 </file>
 
-<file path=ppt/slides/slide127.xml><?xml version="1.0" encoding="utf-8"?>
+<file path=ppt/slides/slide3.xml><?xml version="1.0" encoding="utf-8"?>
 <p:sld xmlns:a="http://schemas.openxmlformats.org/drawingml/2006/main" xmlns:r="http://schemas.openxmlformats.org/officeDocument/2006/relationships" xmlns:p="http://schemas.openxmlformats.org/presentationml/2006/main">
   <p:cSld>
     <p:spTree>
@@ -5290,7 +7089,7 @@
 </p:sld>
 </file>
 
-<file path=ppt/slides/slide128.xml><?xml version="1.0" encoding="utf-8"?>
+<file path=ppt/slides/slide4.xml><?xml version="1.0" encoding="utf-8"?>
 <p:sld xmlns:a="http://schemas.openxmlformats.org/drawingml/2006/main" xmlns:r="http://schemas.openxmlformats.org/officeDocument/2006/relationships" xmlns:p="http://schemas.openxmlformats.org/presentationml/2006/main">
   <p:cSld>
     <p:spTree>
@@ -5637,7 +7436,7 @@
 </p:sld>
 </file>
 
-<file path=ppt/slides/slide129.xml><?xml version="1.0" encoding="utf-8"?>
+<file path=ppt/slides/slide5.xml><?xml version="1.0" encoding="utf-8"?>
 <p:sld xmlns:a="http://schemas.openxmlformats.org/drawingml/2006/main" xmlns:r="http://schemas.openxmlformats.org/officeDocument/2006/relationships" xmlns:p="http://schemas.openxmlformats.org/presentationml/2006/main">
   <p:cSld>
     <p:spTree>
@@ -5920,7 +7719,7 @@
 </p:sld>
 </file>
 
-<file path=ppt/slides/slide130.xml><?xml version="1.0" encoding="utf-8"?>
+<file path=ppt/slides/slide6.xml><?xml version="1.0" encoding="utf-8"?>
 <p:sld xmlns:a="http://schemas.openxmlformats.org/drawingml/2006/main" xmlns:r="http://schemas.openxmlformats.org/officeDocument/2006/relationships" xmlns:p="http://schemas.openxmlformats.org/presentationml/2006/main">
   <p:cSld>
     <p:spTree>
@@ -6247,7 +8046,7 @@
 </p:sld>
 </file>
 
-<file path=ppt/slides/slide131.xml><?xml version="1.0" encoding="utf-8"?>
+<file path=ppt/slides/slide7.xml><?xml version="1.0" encoding="utf-8"?>
 <p:sld xmlns:a="http://schemas.openxmlformats.org/drawingml/2006/main" xmlns:r="http://schemas.openxmlformats.org/officeDocument/2006/relationships" xmlns:p="http://schemas.openxmlformats.org/presentationml/2006/main">
   <p:cSld>
     <p:spTree>
@@ -6494,7 +8293,7 @@
 </p:sld>
 </file>
 
-<file path=ppt/slides/slide132.xml><?xml version="1.0" encoding="utf-8"?>
+<file path=ppt/slides/slide8.xml><?xml version="1.0" encoding="utf-8"?>
 <p:sld xmlns:a="http://schemas.openxmlformats.org/drawingml/2006/main" xmlns:r="http://schemas.openxmlformats.org/officeDocument/2006/relationships" xmlns:p="http://schemas.openxmlformats.org/presentationml/2006/main">
   <p:cSld>
     <p:spTree>
@@ -6827,7 +8626,7 @@
 </p:sld>
 </file>
 
-<file path=ppt/slides/slide133.xml><?xml version="1.0" encoding="utf-8"?>
+<file path=ppt/slides/slide9.xml><?xml version="1.0" encoding="utf-8"?>
 <p:sld xmlns:a="http://schemas.openxmlformats.org/drawingml/2006/main" xmlns:r="http://schemas.openxmlformats.org/officeDocument/2006/relationships" xmlns:p="http://schemas.openxmlformats.org/presentationml/2006/main">
   <p:cSld>
     <p:spTree>
@@ -7081,1251 +8880,6 @@
             <a:pPr algn="r"/>
             <a:r>
               <a:t>133</a:t>
-            </a:r>
-            <a:endParaRPr sz="1000" b="1">
-              <a:solidFill>
-                <a:srgbClr val="7A8A6E"/>
-              </a:solidFill>
-              <a:latin typeface="Calibri"/>
-            </a:endParaRPr>
-          </a:p>
-        </p:txBody>
-      </p:sp>
-    </p:spTree>
-  </p:cSld>
-  <p:clrMapOvr>
-    <a:masterClrMapping/>
-  </p:clrMapOvr>
-</p:sld>
-</file>
-
-<file path=ppt/slides/slide134.xml><?xml version="1.0" encoding="utf-8"?>
-<p:sld xmlns:a="http://schemas.openxmlformats.org/drawingml/2006/main" xmlns:r="http://schemas.openxmlformats.org/officeDocument/2006/relationships" xmlns:p="http://schemas.openxmlformats.org/presentationml/2006/main">
-  <p:cSld>
-    <p:spTree>
-      <p:nvGrpSpPr>
-        <p:cNvPr id="1" name=""/>
-        <p:cNvGrpSpPr/>
-        <p:nvPr/>
-      </p:nvGrpSpPr>
-      <p:grpSpPr>
-        <a:xfrm>
-          <a:off x="0" y="0"/>
-          <a:ext cx="0" cy="0"/>
-          <a:chOff x="0" y="0"/>
-          <a:chExt cx="0" cy="0"/>
-        </a:xfrm>
-      </p:grpSpPr>
-      <p:sp>
-        <p:nvSpPr>
-          <p:cNvPr id="2" name="Rectangle 1"/>
-          <p:cNvSpPr/>
-          <p:nvPr/>
-        </p:nvSpPr>
-        <p:spPr>
-          <a:xfrm>
-            <a:off x="0" y="0"/>
-            <a:ext cx="12191695" cy="6858000"/>
-          </a:xfrm>
-          <a:prstGeom prst="rect">
-            <a:avLst/>
-          </a:prstGeom>
-          <a:solidFill>
-            <a:srgbClr val="FFFFFF"/>
-          </a:solidFill>
-          <a:ln>
-            <a:noFill/>
-          </a:ln>
-        </p:spPr>
-        <p:txBody>
-          <a:bodyPr/>
-          <a:lstStyle/>
-          <a:p>
-            <a:endParaRPr/>
-          </a:p>
-        </p:txBody>
-      </p:sp>
-      <p:sp>
-        <p:nvSpPr>
-          <p:cNvPr id="3" name="TextBox 2"/>
-          <p:cNvSpPr txBox="1"/>
-          <p:nvPr/>
-        </p:nvSpPr>
-        <p:spPr>
-          <a:xfrm>
-            <a:off x="822960" y="502920"/>
-            <a:ext cx="10515600" cy="822960"/>
-          </a:xfrm>
-          <a:prstGeom prst="rect">
-            <a:avLst/>
-          </a:prstGeom>
-          <a:noFill/>
-        </p:spPr>
-        <p:txBody>
-          <a:bodyPr wrap="square">
-            <a:spAutoFit/>
-          </a:bodyPr>
-          <a:lstStyle/>
-          <a:p>
-            <a:pPr algn="l">
-              <a:spcAft>
-                <a:spcPts val="600"/>
-              </a:spcAft>
-            </a:pPr>
-            <a:r>
-              <a:rPr sz="2800" b="1" i="0">
-                <a:solidFill>
-                  <a:srgbClr val="2C5F2D"/>
-                </a:solidFill>
-                <a:latin typeface="Cambria"/>
-              </a:rPr>
-              <a:t>Homework — Two Weeks, Four Parts</a:t>
-            </a:r>
-          </a:p>
-        </p:txBody>
-      </p:sp>
-      <p:sp>
-        <p:nvSpPr>
-          <p:cNvPr id="4" name="TextBox 4"/>
-          <p:cNvSpPr txBox="1"/>
-          <p:nvPr/>
-        </p:nvSpPr>
-        <p:spPr>
-          <a:xfrm>
-            <a:off x="822960" y="1554480"/>
-            <a:ext cx="6675120" cy="4892040"/>
-          </a:xfrm>
-          <a:prstGeom prst="rect">
-            <a:avLst/>
-          </a:prstGeom>
-          <a:noFill/>
-        </p:spPr>
-        <p:txBody>
-          <a:bodyPr wrap="square" lIns="91440" tIns="91440" rIns="91440" bIns="91440"/>
-          <a:lstStyle/>
-          <a:p>
-            <a:pPr marL="274320" indent="-274320">
-              <a:spcAft>
-                <a:spcPts val="900"/>
-              </a:spcAft>
-            </a:pPr>
-            <a:r>
-              <a:rPr sz="2200" b="1" i="0">
-                <a:solidFill>
-                  <a:srgbClr val="97BC62"/>
-                </a:solidFill>
-                <a:latin typeface="Calibri"/>
-              </a:rPr>
-              <a:t>•  </a:t>
-            </a:r>
-            <a:r>
-              <a:rPr sz="2200" b="0" i="0">
-                <a:solidFill>
-                  <a:srgbClr val="222B22"/>
-                </a:solidFill>
-                <a:latin typeface="Calibri"/>
-              </a:rPr>
-              <a:t>Keep the garden rhythm — two returns this week, five to ten minutes each</a:t>
-            </a:r>
-          </a:p>
-          <a:p>
-            <a:pPr marL="274320" indent="-274320">
-              <a:spcAft>
-                <a:spcPts val="900"/>
-              </a:spcAft>
-            </a:pPr>
-            <a:r>
-              <a:rPr sz="2200" b="1" i="0">
-                <a:solidFill>
-                  <a:srgbClr val="97BC62"/>
-                </a:solidFill>
-                <a:latin typeface="Calibri"/>
-              </a:rPr>
-              <a:t>•  </a:t>
-            </a:r>
-            <a:r>
-              <a:rPr sz="2200" b="0" i="0">
-                <a:solidFill>
-                  <a:srgbClr val="222B22"/>
-                </a:solidFill>
-                <a:latin typeface="Calibri"/>
-              </a:rPr>
-              <a:t>“You know the way now — you don’t need the script.” Go back, walk a little, notice where He is</a:t>
-            </a:r>
-          </a:p>
-          <a:p>
-            <a:pPr marL="274320" indent="-274320">
-              <a:spcAft>
-                <a:spcPts val="900"/>
-              </a:spcAft>
-            </a:pPr>
-            <a:r>
-              <a:rPr sz="2200" b="1" i="0">
-                <a:solidFill>
-                  <a:srgbClr val="97BC62"/>
-                </a:solidFill>
-                <a:latin typeface="Calibri"/>
-              </a:rPr>
-              <a:t>•  </a:t>
-            </a:r>
-            <a:r>
-              <a:rPr sz="2200" b="0" i="0">
-                <a:solidFill>
-                  <a:srgbClr val="222B22"/>
-                </a:solidFill>
-                <a:latin typeface="Calibri"/>
-              </a:rPr>
-              <a:t>Journal each visit — even two sentences — “the garden speaks slowly, and the journal is how you hear it across weeks”</a:t>
-            </a:r>
-          </a:p>
-          <a:p>
-            <a:pPr marL="274320" indent="-274320">
-              <a:spcAft>
-                <a:spcPts val="900"/>
-              </a:spcAft>
-            </a:pPr>
-            <a:r>
-              <a:rPr sz="2200" b="1" i="0">
-                <a:solidFill>
-                  <a:srgbClr val="97BC62"/>
-                </a:solidFill>
-                <a:latin typeface="Calibri"/>
-              </a:rPr>
-              <a:t>•  </a:t>
-            </a:r>
-            <a:r>
-              <a:rPr sz="2200" b="0" i="0">
-                <a:solidFill>
-                  <a:srgbClr val="222B22"/>
-                </a:solidFill>
-                <a:latin typeface="Calibri"/>
-              </a:rPr>
-              <a:t>If a return surfaces something heavy — stop, open your eyes, come back another day; tell a trusted adult</a:t>
-            </a:r>
-          </a:p>
-          <a:p>
-            <a:pPr marL="274320" indent="-274320">
-              <a:spcAft>
-                <a:spcPts val="900"/>
-              </a:spcAft>
-            </a:pPr>
-            <a:r>
-              <a:rPr sz="2200" b="1" i="0">
-                <a:solidFill>
-                  <a:srgbClr val="97BC62"/>
-                </a:solidFill>
-                <a:latin typeface="Calibri"/>
-              </a:rPr>
-              <a:t>•  </a:t>
-            </a:r>
-            <a:r>
-              <a:rPr sz="2200" b="0" i="0">
-                <a:solidFill>
-                  <a:srgbClr val="222B22"/>
-                </a:solidFill>
-                <a:latin typeface="Calibri"/>
-              </a:rPr>
-              <a:t>Three visits drops to two on purpose — a rhythm that survives, not a sprint that impresses</a:t>
-            </a:r>
-          </a:p>
-        </p:txBody>
-      </p:sp>
-      <p:sp>
-        <p:nvSpPr>
-          <p:cNvPr id="90" name="SlideNum"/>
-          <p:cNvSpPr txBox="1"/>
-          <p:nvPr/>
-        </p:nvSpPr>
-        <p:spPr>
-          <a:xfrm>
-            <a:off x="11384280" y="6446520"/>
-            <a:ext cx="640080" cy="292608"/>
-          </a:xfrm>
-          <a:prstGeom prst="rect">
-            <a:avLst/>
-          </a:prstGeom>
-          <a:noFill/>
-        </p:spPr>
-        <p:txBody>
-          <a:bodyPr wrap="none" lIns="0" tIns="0" rIns="45720" bIns="0" anchor="ctr"/>
-          <a:lstStyle/>
-          <a:p>
-            <a:pPr algn="r"/>
-            <a:r>
-              <a:t>134</a:t>
-            </a:r>
-            <a:endParaRPr sz="1000" b="1">
-              <a:solidFill>
-                <a:srgbClr val="7A8A6E"/>
-              </a:solidFill>
-              <a:latin typeface="Calibri"/>
-            </a:endParaRPr>
-          </a:p>
-        </p:txBody>
-      </p:sp>
-      <p:pic>
-        <p:nvPicPr>
-          <p:cNvPr id="33" name="Picture 33" descr="seedling - what grows between Wednesdays"/>
-          <p:cNvPicPr>
-            <a:picLocks noChangeAspect="1"/>
-          </p:cNvPicPr>
-          <p:nvPr/>
-        </p:nvPicPr>
-        <p:blipFill>
-          <a:blip r:embed="rId3"/>
-          <a:stretch>
-            <a:fillRect/>
-          </a:stretch>
-        </p:blipFill>
-        <p:spPr>
-          <a:xfrm>
-            <a:off x="8103612" y="1463040"/>
-            <a:ext cx="3262379" cy="4892040"/>
-          </a:xfrm>
-          <a:prstGeom prst="rect">
-            <a:avLst/>
-          </a:prstGeom>
-          <a:ln w="76200">
-            <a:solidFill>
-              <a:srgbClr val="FFFFFF"/>
-            </a:solidFill>
-          </a:ln>
-          <a:effectLst>
-            <a:outerShdw blurRad="63500" dist="25400" dir="5400000" rotWithShape="0">
-              <a:srgbClr val="000000">
-                <a:alpha val="35000"/>
-              </a:srgbClr>
-            </a:outerShdw>
-          </a:effectLst>
-        </p:spPr>
-      </p:pic>
-    </p:spTree>
-  </p:cSld>
-  <p:clrMapOvr>
-    <a:masterClrMapping/>
-  </p:clrMapOvr>
-</p:sld>
-</file>
-
-<file path=ppt/slides/slide135.xml><?xml version="1.0" encoding="utf-8"?>
-<p:sld xmlns:a="http://schemas.openxmlformats.org/drawingml/2006/main" xmlns:r="http://schemas.openxmlformats.org/officeDocument/2006/relationships" xmlns:p="http://schemas.openxmlformats.org/presentationml/2006/main">
-  <p:cSld>
-    <p:spTree>
-      <p:nvGrpSpPr>
-        <p:cNvPr id="1" name=""/>
-        <p:cNvGrpSpPr/>
-        <p:nvPr/>
-      </p:nvGrpSpPr>
-      <p:grpSpPr>
-        <a:xfrm>
-          <a:off x="0" y="0"/>
-          <a:ext cx="0" cy="0"/>
-          <a:chOff x="0" y="0"/>
-          <a:chExt cx="0" cy="0"/>
-        </a:xfrm>
-      </p:grpSpPr>
-      <p:sp>
-        <p:nvSpPr>
-          <p:cNvPr id="2" name="Rectangle 1"/>
-          <p:cNvSpPr/>
-          <p:nvPr/>
-        </p:nvSpPr>
-        <p:spPr>
-          <a:xfrm>
-            <a:off x="0" y="0"/>
-            <a:ext cx="12191695" cy="6858000"/>
-          </a:xfrm>
-          <a:prstGeom prst="rect">
-            <a:avLst/>
-          </a:prstGeom>
-          <a:solidFill>
-            <a:srgbClr val="FFFFFF"/>
-          </a:solidFill>
-          <a:ln>
-            <a:noFill/>
-          </a:ln>
-        </p:spPr>
-        <p:txBody>
-          <a:bodyPr/>
-          <a:lstStyle/>
-          <a:p>
-            <a:endParaRPr/>
-          </a:p>
-        </p:txBody>
-      </p:sp>
-      <p:sp>
-        <p:nvSpPr>
-          <p:cNvPr id="3" name="TextBox 2"/>
-          <p:cNvSpPr txBox="1"/>
-          <p:nvPr/>
-        </p:nvSpPr>
-        <p:spPr>
-          <a:xfrm>
-            <a:off x="822960" y="502920"/>
-            <a:ext cx="10515600" cy="822960"/>
-          </a:xfrm>
-          <a:prstGeom prst="rect">
-            <a:avLst/>
-          </a:prstGeom>
-          <a:noFill/>
-        </p:spPr>
-        <p:txBody>
-          <a:bodyPr wrap="square">
-            <a:spAutoFit/>
-          </a:bodyPr>
-          <a:lstStyle/>
-          <a:p>
-            <a:pPr algn="l">
-              <a:spcAft>
-                <a:spcPts val="600"/>
-              </a:spcAft>
-            </a:pPr>
-            <a:r>
-              <a:rPr sz="2800" b="1" i="0">
-                <a:solidFill>
-                  <a:srgbClr val="2C5F2D"/>
-                </a:solidFill>
-                <a:latin typeface="Cambria"/>
-              </a:rPr>
-              <a:t>Your Take-Home Card — This Session’s Practice</a:t>
-            </a:r>
-          </a:p>
-        </p:txBody>
-      </p:sp>
-      <p:sp>
-        <p:nvSpPr>
-          <p:cNvPr id="90" name="SlideNum"/>
-          <p:cNvSpPr txBox="1"/>
-          <p:nvPr/>
-        </p:nvSpPr>
-        <p:spPr>
-          <a:xfrm>
-            <a:off x="11384280" y="6446520"/>
-            <a:ext cx="640080" cy="292608"/>
-          </a:xfrm>
-          <a:prstGeom prst="rect">
-            <a:avLst/>
-          </a:prstGeom>
-          <a:noFill/>
-        </p:spPr>
-        <p:txBody>
-          <a:bodyPr wrap="none" lIns="0" tIns="0" rIns="45720" bIns="0" anchor="ctr"/>
-          <a:lstStyle/>
-          <a:p>
-            <a:pPr algn="r"/>
-            <a:r>
-              <a:t>135</a:t>
-            </a:r>
-            <a:endParaRPr sz="1000" b="1">
-              <a:solidFill>
-                <a:srgbClr val="7A8A6E"/>
-              </a:solidFill>
-              <a:latin typeface="Calibri"/>
-            </a:endParaRPr>
-          </a:p>
-        </p:txBody>
-      </p:sp>
-      <p:pic>
-        <p:nvPicPr>
-          <p:cNvPr id="270" name="CardImage" descr="the Week 10 check-off card, as handed out"/>
-          <p:cNvPicPr>
-            <a:picLocks noChangeAspect="1"/>
-          </p:cNvPicPr>
-          <p:nvPr/>
-        </p:nvPicPr>
-        <p:blipFill>
-          <a:blip r:embed="rId3"/>
-          <a:stretch>
-            <a:fillRect/>
-          </a:stretch>
-        </p:blipFill>
-        <p:spPr>
-          <a:xfrm>
-            <a:off x="1339945" y="1554480"/>
-            <a:ext cx="9511803" cy="4480560"/>
-          </a:xfrm>
-          <a:prstGeom prst="rect">
-            <a:avLst/>
-          </a:prstGeom>
-          <a:ln w="76200">
-            <a:solidFill>
-              <a:srgbClr val="FFFFFF"/>
-            </a:solidFill>
-          </a:ln>
-          <a:effectLst>
-            <a:outerShdw blurRad="63500" dist="25400" dir="5400000" rotWithShape="0">
-              <a:srgbClr val="000000">
-                <a:alpha val="35000"/>
-              </a:srgbClr>
-            </a:outerShdw>
-          </a:effectLst>
-        </p:spPr>
-      </p:pic>
-      <p:sp>
-        <p:nvSpPr>
-          <p:cNvPr id="271" name="Caption"/>
-          <p:cNvSpPr txBox="1"/>
-          <p:nvPr/>
-        </p:nvSpPr>
-        <p:spPr>
-          <a:xfrm>
-            <a:off x="822960" y="6217920"/>
-            <a:ext cx="10515600" cy="457200"/>
-          </a:xfrm>
-          <a:prstGeom prst="rect">
-            <a:avLst/>
-          </a:prstGeom>
-          <a:noFill/>
-        </p:spPr>
-        <p:txBody>
-          <a:bodyPr wrap="square"/>
-          <a:lstStyle/>
-          <a:p>
-            <a:pPr algn="ctr"/>
-            <a:r>
-              <a:rPr sz="1800" b="0" i="1">
-                <a:solidFill>
-                  <a:srgbClr val="222B22"/>
-                </a:solidFill>
-                <a:latin typeface="Calibri"/>
-              </a:rPr>
-              <a:t>Handed out now — fridge, mirror, journal pocket.</a:t>
-            </a:r>
-          </a:p>
-        </p:txBody>
-      </p:sp>
-    </p:spTree>
-  </p:cSld>
-  <p:clrMapOvr>
-    <a:masterClrMapping/>
-  </p:clrMapOvr>
-</p:sld>
-</file>
-
-<file path=ppt/slides/slide136.xml><?xml version="1.0" encoding="utf-8"?>
-<p:sld xmlns:a="http://schemas.openxmlformats.org/drawingml/2006/main" xmlns:r="http://schemas.openxmlformats.org/officeDocument/2006/relationships" xmlns:p="http://schemas.openxmlformats.org/presentationml/2006/main">
-  <p:cSld>
-    <p:spTree>
-      <p:nvGrpSpPr>
-        <p:cNvPr id="1" name=""/>
-        <p:cNvGrpSpPr/>
-        <p:nvPr/>
-      </p:nvGrpSpPr>
-      <p:grpSpPr>
-        <a:xfrm>
-          <a:off x="0" y="0"/>
-          <a:ext cx="0" cy="0"/>
-          <a:chOff x="0" y="0"/>
-          <a:chExt cx="0" cy="0"/>
-        </a:xfrm>
-      </p:grpSpPr>
-      <p:sp>
-        <p:nvSpPr>
-          <p:cNvPr id="2" name="Rectangle 1"/>
-          <p:cNvSpPr/>
-          <p:nvPr/>
-        </p:nvSpPr>
-        <p:spPr>
-          <a:xfrm>
-            <a:off x="0" y="0"/>
-            <a:ext cx="12191695" cy="6858000"/>
-          </a:xfrm>
-          <a:prstGeom prst="rect">
-            <a:avLst/>
-          </a:prstGeom>
-          <a:solidFill>
-            <a:srgbClr val="FFFFFF"/>
-          </a:solidFill>
-          <a:ln>
-            <a:noFill/>
-          </a:ln>
-        </p:spPr>
-        <p:txBody>
-          <a:bodyPr/>
-          <a:lstStyle/>
-          <a:p>
-            <a:endParaRPr/>
-          </a:p>
-        </p:txBody>
-      </p:sp>
-      <p:sp>
-        <p:nvSpPr>
-          <p:cNvPr id="3" name="TextBox 2"/>
-          <p:cNvSpPr txBox="1"/>
-          <p:nvPr/>
-        </p:nvSpPr>
-        <p:spPr>
-          <a:xfrm>
-            <a:off x="822960" y="502920"/>
-            <a:ext cx="10515600" cy="822960"/>
-          </a:xfrm>
-          <a:prstGeom prst="rect">
-            <a:avLst/>
-          </a:prstGeom>
-          <a:noFill/>
-        </p:spPr>
-        <p:txBody>
-          <a:bodyPr wrap="square">
-            <a:spAutoFit/>
-          </a:bodyPr>
-          <a:lstStyle/>
-          <a:p>
-            <a:pPr algn="l">
-              <a:spcAft>
-                <a:spcPts val="600"/>
-              </a:spcAft>
-            </a:pPr>
-            <a:r>
-              <a:rPr sz="2800" b="1" i="0">
-                <a:solidFill>
-                  <a:srgbClr val="2C5F2D"/>
-                </a:solidFill>
-                <a:latin typeface="Cambria"/>
-              </a:rPr>
-              <a:t>The Leader Feedback Round</a:t>
-            </a:r>
-          </a:p>
-        </p:txBody>
-      </p:sp>
-      <p:sp>
-        <p:nvSpPr>
-          <p:cNvPr id="4" name="TextBox 4"/>
-          <p:cNvSpPr txBox="1"/>
-          <p:nvPr/>
-        </p:nvSpPr>
-        <p:spPr>
-          <a:xfrm>
-            <a:off x="822960" y="1554480"/>
-            <a:ext cx="6675120" cy="4892040"/>
-          </a:xfrm>
-          <a:prstGeom prst="rect">
-            <a:avLst/>
-          </a:prstGeom>
-          <a:noFill/>
-        </p:spPr>
-        <p:txBody>
-          <a:bodyPr wrap="square" lIns="91440" tIns="91440" rIns="91440" bIns="91440"/>
-          <a:lstStyle/>
-          <a:p>
-            <a:pPr marL="274320" indent="-274320">
-              <a:spcAft>
-                <a:spcPts val="900"/>
-              </a:spcAft>
-            </a:pPr>
-            <a:r>
-              <a:rPr sz="2800" b="1" i="0">
-                <a:solidFill>
-                  <a:srgbClr val="97BC62"/>
-                </a:solidFill>
-                <a:latin typeface="Calibri"/>
-              </a:rPr>
-              <a:t>•  </a:t>
-            </a:r>
-            <a:r>
-              <a:rPr sz="2800" b="0" i="0">
-                <a:solidFill>
-                  <a:srgbClr val="222B22"/>
-                </a:solidFill>
-                <a:latin typeface="Calibri"/>
-              </a:rPr>
-              <a:t>Two rounds, same as every session — the container holder first, then the content presenter: three things each</a:t>
-            </a:r>
-          </a:p>
-          <a:p>
-            <a:pPr marL="685800" indent="-274320">
-              <a:spcAft>
-                <a:spcPts val="700"/>
-              </a:spcAft>
-            </a:pPr>
-            <a:r>
-              <a:rPr sz="2000" b="1" i="0">
-                <a:solidFill>
-                  <a:srgbClr val="97BC62"/>
-                </a:solidFill>
-                <a:latin typeface="Calibri"/>
-              </a:rPr>
-              <a:t>–  </a:t>
-            </a:r>
-            <a:r>
-              <a:rPr sz="2000" b="0" i="1">
-                <a:solidFill>
-                  <a:srgbClr val="222B22"/>
-                </a:solidFill>
-                <a:latin typeface="Calibri"/>
-              </a:rPr>
-              <a:t>“What I think went well tonight: ______”</a:t>
-            </a:r>
-          </a:p>
-          <a:p>
-            <a:pPr marL="685800" indent="-274320">
-              <a:spcAft>
-                <a:spcPts val="700"/>
-              </a:spcAft>
-            </a:pPr>
-            <a:r>
-              <a:rPr sz="2000" b="1" i="0">
-                <a:solidFill>
-                  <a:srgbClr val="97BC62"/>
-                </a:solidFill>
-                <a:latin typeface="Calibri"/>
-              </a:rPr>
-              <a:t>–  </a:t>
-            </a:r>
-            <a:r>
-              <a:rPr sz="2000" b="0" i="1">
-                <a:solidFill>
-                  <a:srgbClr val="222B22"/>
-                </a:solidFill>
-                <a:latin typeface="Calibri"/>
-              </a:rPr>
-              <a:t>“What I’d do differently next time: ______”</a:t>
-            </a:r>
-          </a:p>
-          <a:p>
-            <a:pPr marL="685800" indent="-274320">
-              <a:spcAft>
-                <a:spcPts val="700"/>
-              </a:spcAft>
-            </a:pPr>
-            <a:r>
-              <a:rPr sz="2000" b="1" i="0">
-                <a:solidFill>
-                  <a:srgbClr val="97BC62"/>
-                </a:solidFill>
-                <a:latin typeface="Calibri"/>
-              </a:rPr>
-              <a:t>–  </a:t>
-            </a:r>
-            <a:r>
-              <a:rPr sz="2000" b="0" i="1">
-                <a:solidFill>
-                  <a:srgbClr val="222B22"/>
-                </a:solidFill>
-                <a:latin typeface="Calibri"/>
-              </a:rPr>
-              <a:t>“If I were to teach tonight’s process to someone, I would tell them: ______”</a:t>
-            </a:r>
-          </a:p>
-          <a:p>
-            <a:pPr marL="274320" indent="-274320">
-              <a:spcAft>
-                <a:spcPts val="900"/>
-              </a:spcAft>
-            </a:pPr>
-            <a:r>
-              <a:rPr sz="2800" b="1" i="0">
-                <a:solidFill>
-                  <a:srgbClr val="97BC62"/>
-                </a:solidFill>
-                <a:latin typeface="Calibri"/>
-              </a:rPr>
-              <a:t>•  </a:t>
-            </a:r>
-            <a:r>
-              <a:rPr sz="2800" b="0" i="0">
-                <a:solidFill>
-                  <a:srgbClr val="222B22"/>
-                </a:solidFill>
-                <a:latin typeface="Calibri"/>
-              </a:rPr>
-              <a:t>Then the room — the same two questions about tonight</a:t>
-            </a:r>
-          </a:p>
-          <a:p>
-            <a:pPr marL="274320" indent="-274320">
-              <a:spcAft>
-                <a:spcPts val="900"/>
-              </a:spcAft>
-            </a:pPr>
-            <a:r>
-              <a:rPr sz="2800" b="1" i="0">
-                <a:solidFill>
-                  <a:srgbClr val="97BC62"/>
-                </a:solidFill>
-                <a:latin typeface="Calibri"/>
-              </a:rPr>
-              <a:t>•  </a:t>
-            </a:r>
-            <a:r>
-              <a:rPr sz="2800" b="0" i="0">
-                <a:solidFill>
-                  <a:srgbClr val="222B22"/>
-                </a:solidFill>
-                <a:latin typeface="Calibri"/>
-              </a:rPr>
-              <a:t>The leaders receive without defending — “thank you” is the whole response</a:t>
-            </a:r>
-          </a:p>
-        </p:txBody>
-      </p:sp>
-      <p:sp>
-        <p:nvSpPr>
-          <p:cNvPr id="90" name="SlideNum"/>
-          <p:cNvSpPr txBox="1"/>
-          <p:nvPr/>
-        </p:nvSpPr>
-        <p:spPr>
-          <a:xfrm>
-            <a:off x="11384280" y="6446520"/>
-            <a:ext cx="640080" cy="292608"/>
-          </a:xfrm>
-          <a:prstGeom prst="rect">
-            <a:avLst/>
-          </a:prstGeom>
-          <a:noFill/>
-        </p:spPr>
-        <p:txBody>
-          <a:bodyPr wrap="none" lIns="0" tIns="0" rIns="45720" bIns="0" anchor="ctr"/>
-          <a:lstStyle/>
-          <a:p>
-            <a:pPr algn="r"/>
-            <a:r>
-              <a:t>136</a:t>
-            </a:r>
-            <a:endParaRPr sz="1000" b="1">
-              <a:solidFill>
-                <a:srgbClr val="7A8A6E"/>
-              </a:solidFill>
-              <a:latin typeface="Calibri"/>
-            </a:endParaRPr>
-          </a:p>
-        </p:txBody>
-      </p:sp>
-      <p:pic>
-        <p:nvPicPr>
-          <p:cNvPr id="33" name="Picture 33" descr="compass on the trail - the weekly bearing check"/>
-          <p:cNvPicPr>
-            <a:picLocks noChangeAspect="1"/>
-          </p:cNvPicPr>
-          <p:nvPr/>
-        </p:nvPicPr>
-        <p:blipFill>
-          <a:blip r:embed="rId3"/>
-          <a:stretch>
-            <a:fillRect/>
-          </a:stretch>
-        </p:blipFill>
-        <p:spPr>
-          <a:xfrm>
-            <a:off x="8106160" y="1463040"/>
-            <a:ext cx="3259831" cy="4892040"/>
-          </a:xfrm>
-          <a:prstGeom prst="rect">
-            <a:avLst/>
-          </a:prstGeom>
-          <a:ln w="76200">
-            <a:solidFill>
-              <a:srgbClr val="FFFFFF"/>
-            </a:solidFill>
-          </a:ln>
-          <a:effectLst>
-            <a:outerShdw blurRad="63500" dist="25400" dir="5400000" rotWithShape="0">
-              <a:srgbClr val="000000">
-                <a:alpha val="35000"/>
-              </a:srgbClr>
-            </a:outerShdw>
-          </a:effectLst>
-        </p:spPr>
-      </p:pic>
-    </p:spTree>
-  </p:cSld>
-  <p:clrMapOvr>
-    <a:masterClrMapping/>
-  </p:clrMapOvr>
-</p:sld>
-</file>
-
-<file path=ppt/slides/slide137.xml><?xml version="1.0" encoding="utf-8"?>
-<p:sld xmlns:a="http://schemas.openxmlformats.org/drawingml/2006/main" xmlns:r="http://schemas.openxmlformats.org/officeDocument/2006/relationships" xmlns:p="http://schemas.openxmlformats.org/presentationml/2006/main">
-  <p:cSld>
-    <p:spTree>
-      <p:nvGrpSpPr>
-        <p:cNvPr id="1" name=""/>
-        <p:cNvGrpSpPr/>
-        <p:nvPr/>
-      </p:nvGrpSpPr>
-      <p:grpSpPr>
-        <a:xfrm>
-          <a:off x="0" y="0"/>
-          <a:ext cx="0" cy="0"/>
-          <a:chOff x="0" y="0"/>
-          <a:chExt cx="0" cy="0"/>
-        </a:xfrm>
-      </p:grpSpPr>
-      <p:sp>
-        <p:nvSpPr>
-          <p:cNvPr id="2" name="Rectangle 1"/>
-          <p:cNvSpPr/>
-          <p:nvPr/>
-        </p:nvSpPr>
-        <p:spPr>
-          <a:xfrm>
-            <a:off x="0" y="0"/>
-            <a:ext cx="12191695" cy="6858000"/>
-          </a:xfrm>
-          <a:prstGeom prst="rect">
-            <a:avLst/>
-          </a:prstGeom>
-          <a:solidFill>
-            <a:srgbClr val="FFFFFF"/>
-          </a:solidFill>
-          <a:ln>
-            <a:noFill/>
-          </a:ln>
-        </p:spPr>
-        <p:txBody>
-          <a:bodyPr/>
-          <a:lstStyle/>
-          <a:p>
-            <a:endParaRPr/>
-          </a:p>
-        </p:txBody>
-      </p:sp>
-      <p:sp>
-        <p:nvSpPr>
-          <p:cNvPr id="3" name="TextBox 2"/>
-          <p:cNvSpPr txBox="1"/>
-          <p:nvPr/>
-        </p:nvSpPr>
-        <p:spPr>
-          <a:xfrm>
-            <a:off x="822960" y="502920"/>
-            <a:ext cx="10515600" cy="822960"/>
-          </a:xfrm>
-          <a:prstGeom prst="rect">
-            <a:avLst/>
-          </a:prstGeom>
-          <a:noFill/>
-        </p:spPr>
-        <p:txBody>
-          <a:bodyPr wrap="square">
-            <a:spAutoFit/>
-          </a:bodyPr>
-          <a:lstStyle/>
-          <a:p>
-            <a:pPr algn="l">
-              <a:spcAft>
-                <a:spcPts val="600"/>
-              </a:spcAft>
-            </a:pPr>
-            <a:r>
-              <a:rPr sz="2800" b="1" i="0">
-                <a:solidFill>
-                  <a:srgbClr val="2C5F2D"/>
-                </a:solidFill>
-                <a:latin typeface="Cambria"/>
-              </a:rPr>
-              <a:t>Closing the Container + Aaronic Blessing</a:t>
-            </a:r>
-          </a:p>
-        </p:txBody>
-      </p:sp>
-      <p:sp>
-        <p:nvSpPr>
-          <p:cNvPr id="4" name="TextBox 4"/>
-          <p:cNvSpPr txBox="1"/>
-          <p:nvPr/>
-        </p:nvSpPr>
-        <p:spPr>
-          <a:xfrm>
-            <a:off x="822960" y="1600200"/>
-            <a:ext cx="5669280" cy="4572000"/>
-          </a:xfrm>
-          <a:prstGeom prst="rect">
-            <a:avLst/>
-          </a:prstGeom>
-          <a:noFill/>
-        </p:spPr>
-        <p:txBody>
-          <a:bodyPr wrap="square" lIns="91440" tIns="91440" rIns="91440" bIns="91440"/>
-          <a:lstStyle/>
-          <a:p>
-            <a:pPr marL="274320" indent="-274320">
-              <a:spcAft>
-                <a:spcPts val="900"/>
-              </a:spcAft>
-            </a:pPr>
-            <a:r>
-              <a:rPr sz="2200" b="1" i="0">
-                <a:solidFill>
-                  <a:srgbClr val="97BC62"/>
-                </a:solidFill>
-                <a:latin typeface="Calibri"/>
-              </a:rPr>
-              <a:t>•  </a:t>
-            </a:r>
-            <a:r>
-              <a:rPr sz="2200" b="0" i="0">
-                <a:solidFill>
-                  <a:srgbClr val="222B22"/>
-                </a:solidFill>
-                <a:latin typeface="Calibri"/>
-              </a:rPr>
-              <a:t>We close the way we opened — the container, six steps:</a:t>
-            </a:r>
-          </a:p>
-          <a:p>
-            <a:pPr marL="685800" indent="-274320">
-              <a:spcAft>
-                <a:spcPts val="700"/>
-              </a:spcAft>
-            </a:pPr>
-            <a:r>
-              <a:rPr sz="2000" b="1" i="0">
-                <a:solidFill>
-                  <a:srgbClr val="97BC62"/>
-                </a:solidFill>
-                <a:latin typeface="Calibri"/>
-              </a:rPr>
-              <a:t>1   </a:t>
-            </a:r>
-            <a:r>
-              <a:rPr sz="2000" b="0" i="0">
-                <a:solidFill>
-                  <a:srgbClr val="222B22"/>
-                </a:solidFill>
-                <a:latin typeface="Calibri"/>
-              </a:rPr>
-              <a:t>Stand again — same circle, same posture as the open</a:t>
-            </a:r>
-          </a:p>
-          <a:p>
-            <a:pPr marL="685800" indent="-274320">
-              <a:spcAft>
-                <a:spcPts val="700"/>
-              </a:spcAft>
-            </a:pPr>
-            <a:r>
-              <a:rPr sz="2000" b="1" i="0">
-                <a:solidFill>
-                  <a:srgbClr val="97BC62"/>
-                </a:solidFill>
-                <a:latin typeface="Calibri"/>
-              </a:rPr>
-              <a:t>2   </a:t>
-            </a:r>
-            <a:r>
-              <a:rPr sz="2000" b="0" i="0">
-                <a:solidFill>
-                  <a:srgbClr val="222B22"/>
-                </a:solidFill>
-                <a:latin typeface="Calibri"/>
-              </a:rPr>
-              <a:t>One-word landing — compare it to your opening word</a:t>
-            </a:r>
-          </a:p>
-          <a:p>
-            <a:pPr marL="685800" indent="-274320">
-              <a:spcAft>
-                <a:spcPts val="700"/>
-              </a:spcAft>
-            </a:pPr>
-            <a:r>
-              <a:rPr sz="2000" b="1" i="0">
-                <a:solidFill>
-                  <a:srgbClr val="97BC62"/>
-                </a:solidFill>
-                <a:latin typeface="Calibri"/>
-              </a:rPr>
-              <a:t>3   </a:t>
-            </a:r>
-            <a:r>
-              <a:rPr sz="2000" b="0" i="0">
-                <a:solidFill>
-                  <a:srgbClr val="222B22"/>
-                </a:solidFill>
-                <a:latin typeface="Calibri"/>
-              </a:rPr>
-              <a:t>The one thing you are taking from tonight</a:t>
-            </a:r>
-          </a:p>
-          <a:p>
-            <a:pPr marL="685800" indent="-274320">
-              <a:spcAft>
-                <a:spcPts val="700"/>
-              </a:spcAft>
-            </a:pPr>
-            <a:r>
-              <a:rPr sz="2000" b="1" i="0">
-                <a:solidFill>
-                  <a:srgbClr val="97BC62"/>
-                </a:solidFill>
-                <a:latin typeface="Calibri"/>
-              </a:rPr>
-              <a:t>4   </a:t>
-            </a:r>
-            <a:r>
-              <a:rPr sz="2000" b="0" i="0">
-                <a:solidFill>
-                  <a:srgbClr val="222B22"/>
-                </a:solidFill>
-                <a:latin typeface="Calibri"/>
-              </a:rPr>
-              <a:t>The one practice — committed aloud, or modified to one you will actually keep</a:t>
-            </a:r>
-          </a:p>
-          <a:p>
-            <a:pPr marL="685800" indent="-274320">
-              <a:spcAft>
-                <a:spcPts val="700"/>
-              </a:spcAft>
-            </a:pPr>
-            <a:r>
-              <a:rPr sz="2000" b="1" i="0">
-                <a:solidFill>
-                  <a:srgbClr val="97BC62"/>
-                </a:solidFill>
-                <a:latin typeface="Calibri"/>
-              </a:rPr>
-              <a:t>5   </a:t>
-            </a:r>
-            <a:r>
-              <a:rPr sz="2000" b="0" i="0">
-                <a:solidFill>
-                  <a:srgbClr val="222B22"/>
-                </a:solidFill>
-                <a:latin typeface="Calibri"/>
-              </a:rPr>
-              <a:t>Blessings — specific, witnessed, short</a:t>
-            </a:r>
-          </a:p>
-          <a:p>
-            <a:pPr marL="685800" indent="-274320">
-              <a:spcAft>
-                <a:spcPts val="700"/>
-              </a:spcAft>
-            </a:pPr>
-            <a:r>
-              <a:rPr sz="2000" b="1" i="0">
-                <a:solidFill>
-                  <a:srgbClr val="97BC62"/>
-                </a:solidFill>
-                <a:latin typeface="Calibri"/>
-              </a:rPr>
-              <a:t>6   </a:t>
-            </a:r>
-            <a:r>
-              <a:rPr sz="2000" b="0" i="0">
-                <a:solidFill>
-                  <a:srgbClr val="222B22"/>
-                </a:solidFill>
-                <a:latin typeface="Calibri"/>
-              </a:rPr>
-              <a:t>Closing prayer — and the Aaronic blessing, spoken over each other, face to face</a:t>
-            </a:r>
-          </a:p>
-        </p:txBody>
-      </p:sp>
-      <p:sp>
-        <p:nvSpPr>
-          <p:cNvPr id="6" name="TextBox 6"/>
-          <p:cNvSpPr txBox="1"/>
-          <p:nvPr/>
-        </p:nvSpPr>
-        <p:spPr>
-          <a:xfrm>
-            <a:off x="6766560" y="1737360"/>
-            <a:ext cx="4663440" cy="2926080"/>
-          </a:xfrm>
-          <a:prstGeom prst="rect">
-            <a:avLst/>
-          </a:prstGeom>
-          <a:solidFill>
-            <a:srgbClr val="F1F6EC"/>
-          </a:solidFill>
-        </p:spPr>
-        <p:txBody>
-          <a:bodyPr wrap="square" lIns="91440" tIns="91440" rIns="91440" bIns="91440" anchor="ctr"/>
-          <a:lstStyle/>
-          <a:p>
-            <a:pPr>
-              <a:spcAft>
-                <a:spcPts val="900"/>
-              </a:spcAft>
-            </a:pPr>
-            <a:r>
-              <a:rPr sz="1200" b="1" i="0">
-                <a:solidFill>
-                  <a:srgbClr val="97BC62"/>
-                </a:solidFill>
-                <a:latin typeface="Calibri"/>
-              </a:rPr>
-              <a:t>THE AARONIC BLESSING — NUMBERS 6:24–26</a:t>
-            </a:r>
-          </a:p>
-          <a:p>
-            <a:pPr>
-              <a:spcAft>
-                <a:spcPts val="600"/>
-              </a:spcAft>
-            </a:pPr>
-            <a:r>
-              <a:rPr sz="2400" b="0" i="1">
-                <a:solidFill>
-                  <a:srgbClr val="222B22"/>
-                </a:solidFill>
-                <a:latin typeface="Cambria"/>
-              </a:rPr>
-              <a:t>“The Lord bless you and keep you;</a:t>
-            </a:r>
-          </a:p>
-          <a:p>
-            <a:pPr>
-              <a:spcAft>
-                <a:spcPts val="600"/>
-              </a:spcAft>
-            </a:pPr>
-            <a:r>
-              <a:rPr sz="2400" b="0" i="1">
-                <a:solidFill>
-                  <a:srgbClr val="222B22"/>
-                </a:solidFill>
-                <a:latin typeface="Cambria"/>
-              </a:rPr>
-              <a:t>the Lord make his face to shine upon you, and be gracious to you;</a:t>
-            </a:r>
-          </a:p>
-          <a:p>
-            <a:pPr>
-              <a:spcAft>
-                <a:spcPts val="600"/>
-              </a:spcAft>
-            </a:pPr>
-            <a:r>
-              <a:rPr sz="2400" b="0" i="1">
-                <a:solidFill>
-                  <a:srgbClr val="222B22"/>
-                </a:solidFill>
-                <a:latin typeface="Cambria"/>
-              </a:rPr>
-              <a:t>the Lord lift up his countenance upon you, and give you peace.”</a:t>
-            </a:r>
-          </a:p>
-        </p:txBody>
-      </p:sp>
-      <p:sp>
-        <p:nvSpPr>
-          <p:cNvPr id="90" name="SlideNum"/>
-          <p:cNvSpPr txBox="1"/>
-          <p:nvPr/>
-        </p:nvSpPr>
-        <p:spPr>
-          <a:xfrm>
-            <a:off x="11384280" y="6446520"/>
-            <a:ext cx="640080" cy="292608"/>
-          </a:xfrm>
-          <a:prstGeom prst="rect">
-            <a:avLst/>
-          </a:prstGeom>
-          <a:noFill/>
-        </p:spPr>
-        <p:txBody>
-          <a:bodyPr wrap="none" lIns="0" tIns="0" rIns="45720" bIns="0" anchor="ctr"/>
-          <a:lstStyle/>
-          <a:p>
-            <a:pPr algn="r"/>
-            <a:r>
-              <a:t>137</a:t>
             </a:r>
             <a:endParaRPr sz="1000" b="1">
               <a:solidFill>

--- a/_implementation-notes/evening-series/FotH Evening Session 10 Slides DRAFT v1.pptx
+++ b/_implementation-notes/evening-series/FotH Evening Session 10 Slides DRAFT v1.pptx
@@ -4855,6 +4855,278 @@
                 </a:solidFill>
                 <a:latin typeface="Cambria"/>
               </a:rPr>
+              <a:t>Merge and One-Word Landing</a:t>
+            </a:r>
+          </a:p>
+        </p:txBody>
+      </p:sp>
+      <p:sp>
+        <p:nvSpPr>
+          <p:cNvPr id="4" name="TextBox 4"/>
+          <p:cNvSpPr txBox="1"/>
+          <p:nvPr/>
+        </p:nvSpPr>
+        <p:spPr>
+          <a:xfrm>
+            <a:off x="822960" y="1554480"/>
+            <a:ext cx="10515600" cy="4892040"/>
+          </a:xfrm>
+          <a:prstGeom prst="rect">
+            <a:avLst/>
+          </a:prstGeom>
+          <a:noFill/>
+        </p:spPr>
+        <p:txBody>
+          <a:bodyPr wrap="square" lIns="91440" tIns="91440" rIns="91440" bIns="91440"/>
+          <a:lstStyle/>
+          <a:p>
+            <a:pPr marL="274320" indent="-274320">
+              <a:spcAft>
+                <a:spcPts val="900"/>
+              </a:spcAft>
+            </a:pPr>
+            <a:r>
+              <a:rPr sz="2800" b="1" i="0">
+                <a:solidFill>
+                  <a:srgbClr val="97BC62"/>
+                </a:solidFill>
+                <a:latin typeface="Calibri"/>
+              </a:rPr>
+              <a:t>•  </a:t>
+            </a:r>
+            <a:r>
+              <a:rPr sz="2800" b="0" i="0">
+                <a:solidFill>
+                  <a:srgbClr val="222B22"/>
+                </a:solidFill>
+                <a:latin typeface="Calibri"/>
+              </a:rPr>
+              <a:t>“What happened in your pair stays in your pair.”</a:t>
+            </a:r>
+          </a:p>
+          <a:p>
+            <a:pPr marL="274320" indent="-274320">
+              <a:spcAft>
+                <a:spcPts val="900"/>
+              </a:spcAft>
+            </a:pPr>
+            <a:r>
+              <a:rPr sz="2800" b="1" i="0">
+                <a:solidFill>
+                  <a:srgbClr val="97BC62"/>
+                </a:solidFill>
+                <a:latin typeface="Calibri"/>
+              </a:rPr>
+              <a:t>•  </a:t>
+            </a:r>
+            <a:r>
+              <a:rPr sz="2800" b="0" i="0">
+                <a:solidFill>
+                  <a:srgbClr val="222B22"/>
+                </a:solidFill>
+                <a:latin typeface="Calibri"/>
+              </a:rPr>
+              <a:t>One word each, when you’re ready — not what was said, but what you noticed; you can pass</a:t>
+            </a:r>
+          </a:p>
+          <a:p>
+            <a:pPr marL="685800" indent="-274320">
+              <a:spcAft>
+                <a:spcPts val="700"/>
+              </a:spcAft>
+            </a:pPr>
+            <a:r>
+              <a:rPr sz="2000" b="1" i="0">
+                <a:solidFill>
+                  <a:srgbClr val="97BC62"/>
+                </a:solidFill>
+                <a:latin typeface="Calibri"/>
+              </a:rPr>
+              <a:t>–  </a:t>
+            </a:r>
+            <a:r>
+              <a:rPr sz="2000" b="0" i="1">
+                <a:solidFill>
+                  <a:srgbClr val="222B22"/>
+                </a:solidFill>
+                <a:latin typeface="Calibri"/>
+              </a:rPr>
+              <a:t>“Deeper.” “Same.” “Tender.” “Quiet.” “Harder.” “Found.”</a:t>
+            </a:r>
+          </a:p>
+          <a:p>
+            <a:pPr marL="274320" indent="-274320">
+              <a:spcAft>
+                <a:spcPts val="900"/>
+              </a:spcAft>
+            </a:pPr>
+            <a:r>
+              <a:rPr sz="2800" b="1" i="0">
+                <a:solidFill>
+                  <a:srgbClr val="97BC62"/>
+                </a:solidFill>
+                <a:latin typeface="Calibri"/>
+              </a:rPr>
+              <a:t>•  </a:t>
+            </a:r>
+            <a:r>
+              <a:rPr sz="2800" b="0" i="0">
+                <a:solidFill>
+                  <a:srgbClr val="222B22"/>
+                </a:solidFill>
+                <a:latin typeface="Calibri"/>
+              </a:rPr>
+              <a:t>A parent offers the first word — each one received without commentary</a:t>
+            </a:r>
+          </a:p>
+          <a:p>
+            <a:pPr marL="274320" indent="-274320">
+              <a:spcAft>
+                <a:spcPts val="900"/>
+              </a:spcAft>
+            </a:pPr>
+            <a:r>
+              <a:rPr sz="2800" b="1" i="0">
+                <a:solidFill>
+                  <a:srgbClr val="97BC62"/>
+                </a:solidFill>
+                <a:latin typeface="Calibri"/>
+              </a:rPr>
+              <a:t>•  </a:t>
+            </a:r>
+            <a:r>
+              <a:rPr sz="2800" b="0" i="0">
+                <a:solidFill>
+                  <a:srgbClr val="222B22"/>
+                </a:solidFill>
+                <a:latin typeface="Calibri"/>
+              </a:rPr>
+              <a:t>“A garden visited twice is a garden being tended. Whatever He is doing in yours, He will keep doing it this week.”</a:t>
+            </a:r>
+          </a:p>
+        </p:txBody>
+      </p:sp>
+      <p:sp>
+        <p:nvSpPr>
+          <p:cNvPr id="90" name="SlideNum"/>
+          <p:cNvSpPr txBox="1"/>
+          <p:nvPr/>
+        </p:nvSpPr>
+        <p:spPr>
+          <a:xfrm>
+            <a:off x="11384280" y="6446520"/>
+            <a:ext cx="640080" cy="292608"/>
+          </a:xfrm>
+          <a:prstGeom prst="rect">
+            <a:avLst/>
+          </a:prstGeom>
+          <a:noFill/>
+        </p:spPr>
+        <p:txBody>
+          <a:bodyPr wrap="none" lIns="0" tIns="0" rIns="45720" bIns="0" anchor="ctr"/>
+          <a:lstStyle/>
+          <a:p>
+            <a:pPr algn="r"/>
+            <a:r>
+              <a:t>133</a:t>
+            </a:r>
+            <a:endParaRPr sz="1000" b="1">
+              <a:solidFill>
+                <a:srgbClr val="7A8A6E"/>
+              </a:solidFill>
+              <a:latin typeface="Calibri"/>
+            </a:endParaRPr>
+          </a:p>
+        </p:txBody>
+      </p:sp>
+    </p:spTree>
+  </p:cSld>
+  <p:clrMapOvr>
+    <a:masterClrMapping/>
+  </p:clrMapOvr>
+</p:sld>
+</file>
+
+<file path=ppt/slides/slide11.xml><?xml version="1.0" encoding="utf-8"?>
+<p:sld xmlns:a="http://schemas.openxmlformats.org/drawingml/2006/main" xmlns:r="http://schemas.openxmlformats.org/officeDocument/2006/relationships" xmlns:p="http://schemas.openxmlformats.org/presentationml/2006/main">
+  <p:cSld>
+    <p:spTree>
+      <p:nvGrpSpPr>
+        <p:cNvPr id="1" name=""/>
+        <p:cNvGrpSpPr/>
+        <p:nvPr/>
+      </p:nvGrpSpPr>
+      <p:grpSpPr>
+        <a:xfrm>
+          <a:off x="0" y="0"/>
+          <a:ext cx="0" cy="0"/>
+          <a:chOff x="0" y="0"/>
+          <a:chExt cx="0" cy="0"/>
+        </a:xfrm>
+      </p:grpSpPr>
+      <p:sp>
+        <p:nvSpPr>
+          <p:cNvPr id="2" name="Rectangle 1"/>
+          <p:cNvSpPr/>
+          <p:nvPr/>
+        </p:nvSpPr>
+        <p:spPr>
+          <a:xfrm>
+            <a:off x="0" y="0"/>
+            <a:ext cx="12191695" cy="6858000"/>
+          </a:xfrm>
+          <a:prstGeom prst="rect">
+            <a:avLst/>
+          </a:prstGeom>
+          <a:solidFill>
+            <a:srgbClr val="FFFFFF"/>
+          </a:solidFill>
+          <a:ln>
+            <a:noFill/>
+          </a:ln>
+        </p:spPr>
+        <p:txBody>
+          <a:bodyPr/>
+          <a:lstStyle/>
+          <a:p>
+            <a:endParaRPr/>
+          </a:p>
+        </p:txBody>
+      </p:sp>
+      <p:sp>
+        <p:nvSpPr>
+          <p:cNvPr id="3" name="TextBox 2"/>
+          <p:cNvSpPr txBox="1"/>
+          <p:nvPr/>
+        </p:nvSpPr>
+        <p:spPr>
+          <a:xfrm>
+            <a:off x="822960" y="502920"/>
+            <a:ext cx="10515600" cy="822960"/>
+          </a:xfrm>
+          <a:prstGeom prst="rect">
+            <a:avLst/>
+          </a:prstGeom>
+          <a:noFill/>
+        </p:spPr>
+        <p:txBody>
+          <a:bodyPr wrap="square">
+            <a:spAutoFit/>
+          </a:bodyPr>
+          <a:lstStyle/>
+          <a:p>
+            <a:pPr algn="l">
+              <a:spcAft>
+                <a:spcPts val="600"/>
+              </a:spcAft>
+            </a:pPr>
+            <a:r>
+              <a:rPr sz="2800" b="1" i="0">
+                <a:solidFill>
+                  <a:srgbClr val="2C5F2D"/>
+                </a:solidFill>
+                <a:latin typeface="Cambria"/>
+              </a:rPr>
               <a:t>Homework — Two Weeks, Four Parts</a:t>
             </a:r>
           </a:p>
@@ -5084,6 +5356,390 @@
 </file>
 
 <file path=ppt/slides/slide12.xml><?xml version="1.0" encoding="utf-8"?>
+<p:sld xmlns:a="http://schemas.openxmlformats.org/drawingml/2006/main" xmlns:p="http://schemas.openxmlformats.org/presentationml/2006/main" xmlns:r="http://schemas.openxmlformats.org/officeDocument/2006/relationships">
+  <p:cSld>
+    <p:spTree>
+      <p:nvGrpSpPr>
+        <p:cNvPr id="1" name=""/>
+        <p:cNvGrpSpPr/>
+        <p:nvPr/>
+      </p:nvGrpSpPr>
+      <p:grpSpPr/>
+      <p:sp>
+        <p:nvSpPr>
+          <p:cNvPr id="2" name="Rectangle 1"/>
+          <p:cNvSpPr/>
+          <p:nvPr/>
+        </p:nvSpPr>
+        <p:spPr>
+          <a:xfrm>
+            <a:off x="0" y="0"/>
+            <a:ext cx="12192000" cy="6858000"/>
+          </a:xfrm>
+          <a:prstGeom prst="rect">
+            <a:avLst/>
+          </a:prstGeom>
+          <a:solidFill>
+            <a:srgbClr val="FFFFFF"/>
+          </a:solidFill>
+          <a:ln>
+            <a:noFill/>
+          </a:ln>
+          <a:effectLst/>
+        </p:spPr>
+        <p:style>
+          <a:lnRef idx="1">
+            <a:schemeClr val="accent1"/>
+          </a:lnRef>
+          <a:fillRef idx="3">
+            <a:schemeClr val="accent1"/>
+          </a:fillRef>
+          <a:effectRef idx="2">
+            <a:schemeClr val="accent1"/>
+          </a:effectRef>
+          <a:fontRef idx="minor">
+            <a:schemeClr val="lt1"/>
+          </a:fontRef>
+        </p:style>
+        <p:txBody>
+          <a:bodyPr rtlCol="0" anchor="ctr"/>
+          <a:lstStyle/>
+          <a:p>
+            <a:pPr algn="ctr"/>
+          </a:p>
+        </p:txBody>
+      </p:sp>
+      <p:sp>
+        <p:nvSpPr>
+          <p:cNvPr id="3" name="TextBox 2"/>
+          <p:cNvSpPr txBox="1"/>
+          <p:nvPr/>
+        </p:nvSpPr>
+        <p:spPr>
+          <a:xfrm>
+            <a:off x="822960" y="502920"/>
+            <a:ext cx="10515600" cy="822960"/>
+          </a:xfrm>
+          <a:prstGeom prst="rect">
+            <a:avLst/>
+          </a:prstGeom>
+          <a:noFill/>
+        </p:spPr>
+        <p:txBody>
+          <a:bodyPr wrap="square">
+            <a:spAutoFit/>
+          </a:bodyPr>
+          <a:lstStyle/>
+          <a:p>
+            <a:r>
+              <a:rPr sz="2800" b="1">
+                <a:solidFill>
+                  <a:srgbClr val="2C5F2D"/>
+                </a:solidFill>
+                <a:latin typeface="Cambria"/>
+              </a:rPr>
+              <a:t>The Take-Home Sheet — the Daily Rhythm</a:t>
+            </a:r>
+          </a:p>
+        </p:txBody>
+      </p:sp>
+      <p:pic>
+        <p:nvPicPr>
+          <p:cNvPr id="4" name="Picture 3" descr="s10_part1.png"/>
+          <p:cNvPicPr>
+            <a:picLocks noChangeAspect="1"/>
+          </p:cNvPicPr>
+          <p:nvPr/>
+        </p:nvPicPr>
+        <p:blipFill>
+          <a:blip r:embed="rId2"/>
+          <a:stretch>
+            <a:fillRect/>
+          </a:stretch>
+        </p:blipFill>
+        <p:spPr>
+          <a:xfrm>
+            <a:off x="1798167" y="1463040"/>
+            <a:ext cx="8595360" cy="4457308"/>
+          </a:xfrm>
+          <a:prstGeom prst="rect">
+            <a:avLst/>
+          </a:prstGeom>
+          <a:ln w="12700">
+            <a:solidFill>
+              <a:srgbClr val="C8C8C8"/>
+            </a:solidFill>
+          </a:ln>
+        </p:spPr>
+      </p:pic>
+      <p:sp>
+        <p:nvSpPr>
+          <p:cNvPr id="5" name="TextBox 4"/>
+          <p:cNvSpPr txBox="1"/>
+          <p:nvPr/>
+        </p:nvSpPr>
+        <p:spPr>
+          <a:xfrm>
+            <a:off x="822960" y="6355080"/>
+            <a:ext cx="10515600" cy="411480"/>
+          </a:xfrm>
+          <a:prstGeom prst="rect">
+            <a:avLst/>
+          </a:prstGeom>
+          <a:noFill/>
+        </p:spPr>
+        <p:txBody>
+          <a:bodyPr wrap="square">
+            <a:spAutoFit/>
+          </a:bodyPr>
+          <a:lstStyle/>
+          <a:p>
+            <a:r>
+              <a:rPr sz="1400" i="1">
+                <a:solidFill>
+                  <a:srgbClr val="595959"/>
+                </a:solidFill>
+                <a:latin typeface="Calibri"/>
+              </a:rPr>
+              <a:t>Handed out now — this is the sheet in your hands.</a:t>
+            </a:r>
+          </a:p>
+        </p:txBody>
+      </p:sp>
+      <p:sp>
+        <p:nvSpPr>
+          <p:cNvPr id="90" name="SlideNum"/>
+          <p:cNvSpPr txBox="1"/>
+          <p:nvPr/>
+        </p:nvSpPr>
+        <p:spPr>
+          <a:xfrm>
+            <a:off x="11384280" y="6446520"/>
+            <a:ext cx="640080" cy="292608"/>
+          </a:xfrm>
+          <a:prstGeom prst="rect">
+            <a:avLst/>
+          </a:prstGeom>
+          <a:noFill/>
+        </p:spPr>
+        <p:txBody>
+          <a:bodyPr wrap="none" lIns="0" tIns="0" rIns="45720" bIns="0" anchor="ctr"/>
+          <a:lstStyle/>
+          <a:p>
+            <a:pPr algn="r"/>
+            <a:r>
+              <a:t>135</a:t>
+            </a:r>
+            <a:endParaRPr sz="1000" b="1">
+              <a:solidFill>
+                <a:srgbClr val="7A8A6E"/>
+              </a:solidFill>
+              <a:latin typeface="Calibri"/>
+            </a:endParaRPr>
+          </a:p>
+        </p:txBody>
+      </p:sp>
+    </p:spTree>
+  </p:cSld>
+  <p:clrMapOvr>
+    <a:masterClrMapping/>
+  </p:clrMapOvr>
+</p:sld>
+</file>
+
+<file path=ppt/slides/slide13.xml><?xml version="1.0" encoding="utf-8"?>
+<p:sld xmlns:a="http://schemas.openxmlformats.org/drawingml/2006/main" xmlns:p="http://schemas.openxmlformats.org/presentationml/2006/main" xmlns:r="http://schemas.openxmlformats.org/officeDocument/2006/relationships">
+  <p:cSld>
+    <p:spTree>
+      <p:nvGrpSpPr>
+        <p:cNvPr id="1" name=""/>
+        <p:cNvGrpSpPr/>
+        <p:nvPr/>
+      </p:nvGrpSpPr>
+      <p:grpSpPr/>
+      <p:sp>
+        <p:nvSpPr>
+          <p:cNvPr id="2" name="Rectangle 1"/>
+          <p:cNvSpPr/>
+          <p:nvPr/>
+        </p:nvSpPr>
+        <p:spPr>
+          <a:xfrm>
+            <a:off x="0" y="0"/>
+            <a:ext cx="12192000" cy="6858000"/>
+          </a:xfrm>
+          <a:prstGeom prst="rect">
+            <a:avLst/>
+          </a:prstGeom>
+          <a:solidFill>
+            <a:srgbClr val="FFFFFF"/>
+          </a:solidFill>
+          <a:ln>
+            <a:noFill/>
+          </a:ln>
+          <a:effectLst/>
+        </p:spPr>
+        <p:style>
+          <a:lnRef idx="1">
+            <a:schemeClr val="accent1"/>
+          </a:lnRef>
+          <a:fillRef idx="3">
+            <a:schemeClr val="accent1"/>
+          </a:fillRef>
+          <a:effectRef idx="2">
+            <a:schemeClr val="accent1"/>
+          </a:effectRef>
+          <a:fontRef idx="minor">
+            <a:schemeClr val="lt1"/>
+          </a:fontRef>
+        </p:style>
+        <p:txBody>
+          <a:bodyPr rtlCol="0" anchor="ctr"/>
+          <a:lstStyle/>
+          <a:p>
+            <a:pPr algn="ctr"/>
+          </a:p>
+        </p:txBody>
+      </p:sp>
+      <p:sp>
+        <p:nvSpPr>
+          <p:cNvPr id="3" name="TextBox 2"/>
+          <p:cNvSpPr txBox="1"/>
+          <p:nvPr/>
+        </p:nvSpPr>
+        <p:spPr>
+          <a:xfrm>
+            <a:off x="822960" y="502920"/>
+            <a:ext cx="10515600" cy="822960"/>
+          </a:xfrm>
+          <a:prstGeom prst="rect">
+            <a:avLst/>
+          </a:prstGeom>
+          <a:noFill/>
+        </p:spPr>
+        <p:txBody>
+          <a:bodyPr wrap="square">
+            <a:spAutoFit/>
+          </a:bodyPr>
+          <a:lstStyle/>
+          <a:p>
+            <a:r>
+              <a:rPr sz="2800" b="1">
+                <a:solidFill>
+                  <a:srgbClr val="2C5F2D"/>
+                </a:solidFill>
+                <a:latin typeface="Cambria"/>
+              </a:rPr>
+              <a:t>The Take-Home Sheet — the Four Parts</a:t>
+            </a:r>
+          </a:p>
+        </p:txBody>
+      </p:sp>
+      <p:pic>
+        <p:nvPicPr>
+          <p:cNvPr id="4" name="Picture 3" descr="s10_part2.png"/>
+          <p:cNvPicPr>
+            <a:picLocks noChangeAspect="1"/>
+          </p:cNvPicPr>
+          <p:nvPr/>
+        </p:nvPicPr>
+        <p:blipFill>
+          <a:blip r:embed="rId2"/>
+          <a:stretch>
+            <a:fillRect/>
+          </a:stretch>
+        </p:blipFill>
+        <p:spPr>
+          <a:xfrm>
+            <a:off x="1864253" y="1463040"/>
+            <a:ext cx="8463188" cy="4709160"/>
+          </a:xfrm>
+          <a:prstGeom prst="rect">
+            <a:avLst/>
+          </a:prstGeom>
+          <a:ln w="12700">
+            <a:solidFill>
+              <a:srgbClr val="C8C8C8"/>
+            </a:solidFill>
+          </a:ln>
+        </p:spPr>
+      </p:pic>
+      <p:sp>
+        <p:nvSpPr>
+          <p:cNvPr id="5" name="TextBox 4"/>
+          <p:cNvSpPr txBox="1"/>
+          <p:nvPr/>
+        </p:nvSpPr>
+        <p:spPr>
+          <a:xfrm>
+            <a:off x="822960" y="6355080"/>
+            <a:ext cx="10515600" cy="411480"/>
+          </a:xfrm>
+          <a:prstGeom prst="rect">
+            <a:avLst/>
+          </a:prstGeom>
+          <a:noFill/>
+        </p:spPr>
+        <p:txBody>
+          <a:bodyPr wrap="square">
+            <a:spAutoFit/>
+          </a:bodyPr>
+          <a:lstStyle/>
+          <a:p>
+            <a:r>
+              <a:rPr sz="1400" i="1">
+                <a:solidFill>
+                  <a:srgbClr val="595959"/>
+                </a:solidFill>
+                <a:latin typeface="Calibri"/>
+              </a:rPr>
+              <a:t>One practice at a time — and a partner expecting you at the end of week one.</a:t>
+            </a:r>
+          </a:p>
+        </p:txBody>
+      </p:sp>
+      <p:sp>
+        <p:nvSpPr>
+          <p:cNvPr id="90" name="SlideNum"/>
+          <p:cNvSpPr txBox="1"/>
+          <p:nvPr/>
+        </p:nvSpPr>
+        <p:spPr>
+          <a:xfrm>
+            <a:off x="11384280" y="6446520"/>
+            <a:ext cx="640080" cy="292608"/>
+          </a:xfrm>
+          <a:prstGeom prst="rect">
+            <a:avLst/>
+          </a:prstGeom>
+          <a:noFill/>
+        </p:spPr>
+        <p:txBody>
+          <a:bodyPr wrap="none" lIns="0" tIns="0" rIns="45720" bIns="0" anchor="ctr"/>
+          <a:lstStyle/>
+          <a:p>
+            <a:pPr algn="r"/>
+            <a:r>
+              <a:t>135a</a:t>
+            </a:r>
+            <a:endParaRPr sz="1000" b="1">
+              <a:solidFill>
+                <a:srgbClr val="7A8A6E"/>
+              </a:solidFill>
+              <a:latin typeface="Calibri"/>
+            </a:endParaRPr>
+          </a:p>
+        </p:txBody>
+      </p:sp>
+    </p:spTree>
+  </p:cSld>
+  <p:clrMapOvr>
+    <a:masterClrMapping/>
+  </p:clrMapOvr>
+</p:sld>
+</file>
+
+<file path=ppt/slides/slide14.xml><?xml version="1.0" encoding="utf-8"?>
 <p:sld xmlns:a="http://schemas.openxmlformats.org/drawingml/2006/main" xmlns:r="http://schemas.openxmlformats.org/officeDocument/2006/relationships" xmlns:p="http://schemas.openxmlformats.org/presentationml/2006/main">
   <p:cSld>
     <p:spTree>
@@ -5416,7 +6072,7 @@
 </p:sld>
 </file>
 
-<file path=ppt/slides/slide13.xml><?xml version="1.0" encoding="utf-8"?>
+<file path=ppt/slides/slide15.xml><?xml version="1.0" encoding="utf-8"?>
 <p:sld xmlns:a="http://schemas.openxmlformats.org/drawingml/2006/main" xmlns:r="http://schemas.openxmlformats.org/officeDocument/2006/relationships" xmlns:p="http://schemas.openxmlformats.org/presentationml/2006/main">
   <p:cSld>
     <p:spTree>
@@ -5807,595 +6463,6 @@
             <a:pPr algn="r"/>
             <a:r>
               <a:t>137</a:t>
-            </a:r>
-            <a:endParaRPr sz="1000" b="1">
-              <a:solidFill>
-                <a:srgbClr val="7A8A6E"/>
-              </a:solidFill>
-              <a:latin typeface="Calibri"/>
-            </a:endParaRPr>
-          </a:p>
-        </p:txBody>
-      </p:sp>
-    </p:spTree>
-  </p:cSld>
-  <p:clrMapOvr>
-    <a:masterClrMapping/>
-  </p:clrMapOvr>
-</p:sld>
-</file>
-
-<file path=ppt/slides/slide14.xml><?xml version="1.0" encoding="utf-8"?>
-<p:sld xmlns:a="http://schemas.openxmlformats.org/drawingml/2006/main" xmlns:p="http://schemas.openxmlformats.org/presentationml/2006/main" xmlns:r="http://schemas.openxmlformats.org/officeDocument/2006/relationships">
-  <p:cSld>
-    <p:spTree>
-      <p:nvGrpSpPr>
-        <p:cNvPr id="1" name=""/>
-        <p:cNvGrpSpPr/>
-        <p:nvPr/>
-      </p:nvGrpSpPr>
-      <p:grpSpPr/>
-      <p:sp>
-        <p:nvSpPr>
-          <p:cNvPr id="2" name="Rectangle 1"/>
-          <p:cNvSpPr/>
-          <p:nvPr/>
-        </p:nvSpPr>
-        <p:spPr>
-          <a:xfrm>
-            <a:off x="0" y="0"/>
-            <a:ext cx="12192000" cy="6858000"/>
-          </a:xfrm>
-          <a:prstGeom prst="rect">
-            <a:avLst/>
-          </a:prstGeom>
-          <a:solidFill>
-            <a:srgbClr val="FFFFFF"/>
-          </a:solidFill>
-          <a:ln>
-            <a:noFill/>
-          </a:ln>
-          <a:effectLst/>
-        </p:spPr>
-        <p:style>
-          <a:lnRef idx="1">
-            <a:schemeClr val="accent1"/>
-          </a:lnRef>
-          <a:fillRef idx="3">
-            <a:schemeClr val="accent1"/>
-          </a:fillRef>
-          <a:effectRef idx="2">
-            <a:schemeClr val="accent1"/>
-          </a:effectRef>
-          <a:fontRef idx="minor">
-            <a:schemeClr val="lt1"/>
-          </a:fontRef>
-        </p:style>
-        <p:txBody>
-          <a:bodyPr rtlCol="0" anchor="ctr"/>
-          <a:lstStyle/>
-          <a:p>
-            <a:pPr algn="ctr"/>
-          </a:p>
-        </p:txBody>
-      </p:sp>
-      <p:sp>
-        <p:nvSpPr>
-          <p:cNvPr id="3" name="TextBox 2"/>
-          <p:cNvSpPr txBox="1"/>
-          <p:nvPr/>
-        </p:nvSpPr>
-        <p:spPr>
-          <a:xfrm>
-            <a:off x="822960" y="502920"/>
-            <a:ext cx="10515600" cy="822960"/>
-          </a:xfrm>
-          <a:prstGeom prst="rect">
-            <a:avLst/>
-          </a:prstGeom>
-          <a:noFill/>
-        </p:spPr>
-        <p:txBody>
-          <a:bodyPr wrap="square">
-            <a:spAutoFit/>
-          </a:bodyPr>
-          <a:lstStyle/>
-          <a:p>
-            <a:r>
-              <a:rPr sz="2800" b="1">
-                <a:solidFill>
-                  <a:srgbClr val="2C5F2D"/>
-                </a:solidFill>
-                <a:latin typeface="Cambria"/>
-              </a:rPr>
-              <a:t>Where We Are — the Four Connects</a:t>
-            </a:r>
-          </a:p>
-        </p:txBody>
-      </p:sp>
-      <p:pic>
-        <p:nvPicPr>
-          <p:cNvPr id="4" name="Picture 3" descr="four-connects.png"/>
-          <p:cNvPicPr>
-            <a:picLocks noChangeAspect="1"/>
-          </p:cNvPicPr>
-          <p:nvPr/>
-        </p:nvPicPr>
-        <p:blipFill>
-          <a:blip r:embed="rId2"/>
-          <a:stretch>
-            <a:fillRect/>
-          </a:stretch>
-        </p:blipFill>
-        <p:spPr>
-          <a:xfrm>
-            <a:off x="932688" y="1645920"/>
-            <a:ext cx="10332720" cy="3708663"/>
-          </a:xfrm>
-          <a:prstGeom prst="rect">
-            <a:avLst/>
-          </a:prstGeom>
-        </p:spPr>
-      </p:pic>
-      <p:sp>
-        <p:nvSpPr>
-          <p:cNvPr id="5" name="TextBox 4"/>
-          <p:cNvSpPr txBox="1"/>
-          <p:nvPr/>
-        </p:nvSpPr>
-        <p:spPr>
-          <a:xfrm>
-            <a:off x="822960" y="5623560"/>
-            <a:ext cx="10515600" cy="914400"/>
-          </a:xfrm>
-          <a:prstGeom prst="rect">
-            <a:avLst/>
-          </a:prstGeom>
-          <a:noFill/>
-        </p:spPr>
-        <p:txBody>
-          <a:bodyPr wrap="square">
-            <a:spAutoFit/>
-          </a:bodyPr>
-          <a:lstStyle/>
-          <a:p>
-            <a:r>
-              <a:rPr sz="1800" b="0">
-                <a:solidFill>
-                  <a:srgbClr val="222B22"/>
-                </a:solidFill>
-                <a:latin typeface="Calibri"/>
-              </a:rPr>
-              <a:t>Session 10 stands in the third box — </a:t>
-            </a:r>
-            <a:r>
-              <a:rPr sz="1800" b="1">
-                <a:solidFill>
-                  <a:srgbClr val="2C5F2D"/>
-                </a:solidFill>
-                <a:latin typeface="Calibri"/>
-              </a:rPr>
-              <a:t>Connect with God</a:t>
-            </a:r>
-            <a:r>
-              <a:rPr sz="1800" b="0">
-                <a:solidFill>
-                  <a:srgbClr val="222B22"/>
-                </a:solidFill>
-                <a:latin typeface="Calibri"/>
-              </a:rPr>
-              <a:t> — walked again, teen-led. Each connection makes the next one real (Matt. 22:37–40).</a:t>
-            </a:r>
-          </a:p>
-        </p:txBody>
-      </p:sp>
-      <p:sp>
-        <p:nvSpPr>
-          <p:cNvPr id="90" name="SlideNum"/>
-          <p:cNvSpPr txBox="1"/>
-          <p:nvPr/>
-        </p:nvSpPr>
-        <p:spPr>
-          <a:xfrm>
-            <a:off x="11384280" y="6446520"/>
-            <a:ext cx="640080" cy="292608"/>
-          </a:xfrm>
-          <a:prstGeom prst="rect">
-            <a:avLst/>
-          </a:prstGeom>
-          <a:noFill/>
-        </p:spPr>
-        <p:txBody>
-          <a:bodyPr wrap="none" lIns="0" tIns="0" rIns="45720" bIns="0" anchor="ctr"/>
-          <a:lstStyle/>
-          <a:p>
-            <a:pPr algn="r"/>
-            <a:r>
-              <a:t>126a</a:t>
-            </a:r>
-            <a:endParaRPr sz="1000" b="1">
-              <a:solidFill>
-                <a:srgbClr val="7A8A6E"/>
-              </a:solidFill>
-              <a:latin typeface="Calibri"/>
-            </a:endParaRPr>
-          </a:p>
-        </p:txBody>
-      </p:sp>
-    </p:spTree>
-  </p:cSld>
-  <p:clrMapOvr>
-    <a:masterClrMapping/>
-  </p:clrMapOvr>
-</p:sld>
-</file>
-
-<file path=ppt/slides/slide15.xml><?xml version="1.0" encoding="utf-8"?>
-<p:sld xmlns:a="http://schemas.openxmlformats.org/drawingml/2006/main" xmlns:p="http://schemas.openxmlformats.org/presentationml/2006/main" xmlns:r="http://schemas.openxmlformats.org/officeDocument/2006/relationships">
-  <p:cSld>
-    <p:spTree>
-      <p:nvGrpSpPr>
-        <p:cNvPr id="1" name=""/>
-        <p:cNvGrpSpPr/>
-        <p:nvPr/>
-      </p:nvGrpSpPr>
-      <p:grpSpPr/>
-      <p:sp>
-        <p:nvSpPr>
-          <p:cNvPr id="2" name="Rectangle 1"/>
-          <p:cNvSpPr/>
-          <p:nvPr/>
-        </p:nvSpPr>
-        <p:spPr>
-          <a:xfrm>
-            <a:off x="0" y="0"/>
-            <a:ext cx="12192000" cy="6858000"/>
-          </a:xfrm>
-          <a:prstGeom prst="rect">
-            <a:avLst/>
-          </a:prstGeom>
-          <a:solidFill>
-            <a:srgbClr val="FFFFFF"/>
-          </a:solidFill>
-          <a:ln>
-            <a:noFill/>
-          </a:ln>
-          <a:effectLst/>
-        </p:spPr>
-        <p:style>
-          <a:lnRef idx="1">
-            <a:schemeClr val="accent1"/>
-          </a:lnRef>
-          <a:fillRef idx="3">
-            <a:schemeClr val="accent1"/>
-          </a:fillRef>
-          <a:effectRef idx="2">
-            <a:schemeClr val="accent1"/>
-          </a:effectRef>
-          <a:fontRef idx="minor">
-            <a:schemeClr val="lt1"/>
-          </a:fontRef>
-        </p:style>
-        <p:txBody>
-          <a:bodyPr rtlCol="0" anchor="ctr"/>
-          <a:lstStyle/>
-          <a:p>
-            <a:pPr algn="ctr"/>
-          </a:p>
-        </p:txBody>
-      </p:sp>
-      <p:sp>
-        <p:nvSpPr>
-          <p:cNvPr id="3" name="TextBox 2"/>
-          <p:cNvSpPr txBox="1"/>
-          <p:nvPr/>
-        </p:nvSpPr>
-        <p:spPr>
-          <a:xfrm>
-            <a:off x="822960" y="502920"/>
-            <a:ext cx="10515600" cy="822960"/>
-          </a:xfrm>
-          <a:prstGeom prst="rect">
-            <a:avLst/>
-          </a:prstGeom>
-          <a:noFill/>
-        </p:spPr>
-        <p:txBody>
-          <a:bodyPr wrap="square">
-            <a:spAutoFit/>
-          </a:bodyPr>
-          <a:lstStyle/>
-          <a:p>
-            <a:r>
-              <a:rPr sz="2800" b="1">
-                <a:solidFill>
-                  <a:srgbClr val="2C5F2D"/>
-                </a:solidFill>
-                <a:latin typeface="Cambria"/>
-              </a:rPr>
-              <a:t>The Take-Home Sheet — the Daily Rhythm</a:t>
-            </a:r>
-          </a:p>
-        </p:txBody>
-      </p:sp>
-      <p:pic>
-        <p:nvPicPr>
-          <p:cNvPr id="4" name="Picture 3" descr="s10_part1.png"/>
-          <p:cNvPicPr>
-            <a:picLocks noChangeAspect="1"/>
-          </p:cNvPicPr>
-          <p:nvPr/>
-        </p:nvPicPr>
-        <p:blipFill>
-          <a:blip r:embed="rId2"/>
-          <a:stretch>
-            <a:fillRect/>
-          </a:stretch>
-        </p:blipFill>
-        <p:spPr>
-          <a:xfrm>
-            <a:off x="1798167" y="1463040"/>
-            <a:ext cx="8595360" cy="4457308"/>
-          </a:xfrm>
-          <a:prstGeom prst="rect">
-            <a:avLst/>
-          </a:prstGeom>
-          <a:ln w="12700">
-            <a:solidFill>
-              <a:srgbClr val="C8C8C8"/>
-            </a:solidFill>
-          </a:ln>
-        </p:spPr>
-      </p:pic>
-      <p:sp>
-        <p:nvSpPr>
-          <p:cNvPr id="5" name="TextBox 4"/>
-          <p:cNvSpPr txBox="1"/>
-          <p:nvPr/>
-        </p:nvSpPr>
-        <p:spPr>
-          <a:xfrm>
-            <a:off x="822960" y="6355080"/>
-            <a:ext cx="10515600" cy="411480"/>
-          </a:xfrm>
-          <a:prstGeom prst="rect">
-            <a:avLst/>
-          </a:prstGeom>
-          <a:noFill/>
-        </p:spPr>
-        <p:txBody>
-          <a:bodyPr wrap="square">
-            <a:spAutoFit/>
-          </a:bodyPr>
-          <a:lstStyle/>
-          <a:p>
-            <a:r>
-              <a:rPr sz="1400" i="1">
-                <a:solidFill>
-                  <a:srgbClr val="595959"/>
-                </a:solidFill>
-                <a:latin typeface="Calibri"/>
-              </a:rPr>
-              <a:t>Handed out now — this is the sheet in your hands.</a:t>
-            </a:r>
-          </a:p>
-        </p:txBody>
-      </p:sp>
-      <p:sp>
-        <p:nvSpPr>
-          <p:cNvPr id="90" name="SlideNum"/>
-          <p:cNvSpPr txBox="1"/>
-          <p:nvPr/>
-        </p:nvSpPr>
-        <p:spPr>
-          <a:xfrm>
-            <a:off x="11384280" y="6446520"/>
-            <a:ext cx="640080" cy="292608"/>
-          </a:xfrm>
-          <a:prstGeom prst="rect">
-            <a:avLst/>
-          </a:prstGeom>
-          <a:noFill/>
-        </p:spPr>
-        <p:txBody>
-          <a:bodyPr wrap="none" lIns="0" tIns="0" rIns="45720" bIns="0" anchor="ctr"/>
-          <a:lstStyle/>
-          <a:p>
-            <a:pPr algn="r"/>
-            <a:r>
-              <a:t>135</a:t>
-            </a:r>
-            <a:endParaRPr sz="1000" b="1">
-              <a:solidFill>
-                <a:srgbClr val="7A8A6E"/>
-              </a:solidFill>
-              <a:latin typeface="Calibri"/>
-            </a:endParaRPr>
-          </a:p>
-        </p:txBody>
-      </p:sp>
-    </p:spTree>
-  </p:cSld>
-  <p:clrMapOvr>
-    <a:masterClrMapping/>
-  </p:clrMapOvr>
-</p:sld>
-</file>
-
-<file path=ppt/slides/slide16.xml><?xml version="1.0" encoding="utf-8"?>
-<p:sld xmlns:a="http://schemas.openxmlformats.org/drawingml/2006/main" xmlns:p="http://schemas.openxmlformats.org/presentationml/2006/main" xmlns:r="http://schemas.openxmlformats.org/officeDocument/2006/relationships">
-  <p:cSld>
-    <p:spTree>
-      <p:nvGrpSpPr>
-        <p:cNvPr id="1" name=""/>
-        <p:cNvGrpSpPr/>
-        <p:nvPr/>
-      </p:nvGrpSpPr>
-      <p:grpSpPr/>
-      <p:sp>
-        <p:nvSpPr>
-          <p:cNvPr id="2" name="Rectangle 1"/>
-          <p:cNvSpPr/>
-          <p:nvPr/>
-        </p:nvSpPr>
-        <p:spPr>
-          <a:xfrm>
-            <a:off x="0" y="0"/>
-            <a:ext cx="12192000" cy="6858000"/>
-          </a:xfrm>
-          <a:prstGeom prst="rect">
-            <a:avLst/>
-          </a:prstGeom>
-          <a:solidFill>
-            <a:srgbClr val="FFFFFF"/>
-          </a:solidFill>
-          <a:ln>
-            <a:noFill/>
-          </a:ln>
-          <a:effectLst/>
-        </p:spPr>
-        <p:style>
-          <a:lnRef idx="1">
-            <a:schemeClr val="accent1"/>
-          </a:lnRef>
-          <a:fillRef idx="3">
-            <a:schemeClr val="accent1"/>
-          </a:fillRef>
-          <a:effectRef idx="2">
-            <a:schemeClr val="accent1"/>
-          </a:effectRef>
-          <a:fontRef idx="minor">
-            <a:schemeClr val="lt1"/>
-          </a:fontRef>
-        </p:style>
-        <p:txBody>
-          <a:bodyPr rtlCol="0" anchor="ctr"/>
-          <a:lstStyle/>
-          <a:p>
-            <a:pPr algn="ctr"/>
-          </a:p>
-        </p:txBody>
-      </p:sp>
-      <p:sp>
-        <p:nvSpPr>
-          <p:cNvPr id="3" name="TextBox 2"/>
-          <p:cNvSpPr txBox="1"/>
-          <p:nvPr/>
-        </p:nvSpPr>
-        <p:spPr>
-          <a:xfrm>
-            <a:off x="822960" y="502920"/>
-            <a:ext cx="10515600" cy="822960"/>
-          </a:xfrm>
-          <a:prstGeom prst="rect">
-            <a:avLst/>
-          </a:prstGeom>
-          <a:noFill/>
-        </p:spPr>
-        <p:txBody>
-          <a:bodyPr wrap="square">
-            <a:spAutoFit/>
-          </a:bodyPr>
-          <a:lstStyle/>
-          <a:p>
-            <a:r>
-              <a:rPr sz="2800" b="1">
-                <a:solidFill>
-                  <a:srgbClr val="2C5F2D"/>
-                </a:solidFill>
-                <a:latin typeface="Cambria"/>
-              </a:rPr>
-              <a:t>The Take-Home Sheet — the Four Parts</a:t>
-            </a:r>
-          </a:p>
-        </p:txBody>
-      </p:sp>
-      <p:pic>
-        <p:nvPicPr>
-          <p:cNvPr id="4" name="Picture 3" descr="s10_part2.png"/>
-          <p:cNvPicPr>
-            <a:picLocks noChangeAspect="1"/>
-          </p:cNvPicPr>
-          <p:nvPr/>
-        </p:nvPicPr>
-        <p:blipFill>
-          <a:blip r:embed="rId2"/>
-          <a:stretch>
-            <a:fillRect/>
-          </a:stretch>
-        </p:blipFill>
-        <p:spPr>
-          <a:xfrm>
-            <a:off x="1864253" y="1463040"/>
-            <a:ext cx="8463188" cy="4709160"/>
-          </a:xfrm>
-          <a:prstGeom prst="rect">
-            <a:avLst/>
-          </a:prstGeom>
-          <a:ln w="12700">
-            <a:solidFill>
-              <a:srgbClr val="C8C8C8"/>
-            </a:solidFill>
-          </a:ln>
-        </p:spPr>
-      </p:pic>
-      <p:sp>
-        <p:nvSpPr>
-          <p:cNvPr id="5" name="TextBox 4"/>
-          <p:cNvSpPr txBox="1"/>
-          <p:nvPr/>
-        </p:nvSpPr>
-        <p:spPr>
-          <a:xfrm>
-            <a:off x="822960" y="6355080"/>
-            <a:ext cx="10515600" cy="411480"/>
-          </a:xfrm>
-          <a:prstGeom prst="rect">
-            <a:avLst/>
-          </a:prstGeom>
-          <a:noFill/>
-        </p:spPr>
-        <p:txBody>
-          <a:bodyPr wrap="square">
-            <a:spAutoFit/>
-          </a:bodyPr>
-          <a:lstStyle/>
-          <a:p>
-            <a:r>
-              <a:rPr sz="1400" i="1">
-                <a:solidFill>
-                  <a:srgbClr val="595959"/>
-                </a:solidFill>
-                <a:latin typeface="Calibri"/>
-              </a:rPr>
-              <a:t>One practice at a time — and a partner expecting you at the end of week one.</a:t>
-            </a:r>
-          </a:p>
-        </p:txBody>
-      </p:sp>
-      <p:sp>
-        <p:nvSpPr>
-          <p:cNvPr id="90" name="SlideNum"/>
-          <p:cNvSpPr txBox="1"/>
-          <p:nvPr/>
-        </p:nvSpPr>
-        <p:spPr>
-          <a:xfrm>
-            <a:off x="11384280" y="6446520"/>
-            <a:ext cx="640080" cy="292608"/>
-          </a:xfrm>
-          <a:prstGeom prst="rect">
-            <a:avLst/>
-          </a:prstGeom>
-          <a:noFill/>
-        </p:spPr>
-        <p:txBody>
-          <a:bodyPr wrap="none" lIns="0" tIns="0" rIns="45720" bIns="0" anchor="ctr"/>
-          <a:lstStyle/>
-          <a:p>
-            <a:pPr algn="r"/>
-            <a:r>
-              <a:t>135a</a:t>
             </a:r>
             <a:endParaRPr sz="1000" b="1">
               <a:solidFill>
@@ -6664,6 +6731,211 @@
 </file>
 
 <file path=ppt/slides/slide3.xml><?xml version="1.0" encoding="utf-8"?>
+<p:sld xmlns:a="http://schemas.openxmlformats.org/drawingml/2006/main" xmlns:p="http://schemas.openxmlformats.org/presentationml/2006/main" xmlns:r="http://schemas.openxmlformats.org/officeDocument/2006/relationships">
+  <p:cSld>
+    <p:spTree>
+      <p:nvGrpSpPr>
+        <p:cNvPr id="1" name=""/>
+        <p:cNvGrpSpPr/>
+        <p:nvPr/>
+      </p:nvGrpSpPr>
+      <p:grpSpPr/>
+      <p:sp>
+        <p:nvSpPr>
+          <p:cNvPr id="2" name="Rectangle 1"/>
+          <p:cNvSpPr/>
+          <p:nvPr/>
+        </p:nvSpPr>
+        <p:spPr>
+          <a:xfrm>
+            <a:off x="0" y="0"/>
+            <a:ext cx="12192000" cy="6858000"/>
+          </a:xfrm>
+          <a:prstGeom prst="rect">
+            <a:avLst/>
+          </a:prstGeom>
+          <a:solidFill>
+            <a:srgbClr val="FFFFFF"/>
+          </a:solidFill>
+          <a:ln>
+            <a:noFill/>
+          </a:ln>
+          <a:effectLst/>
+        </p:spPr>
+        <p:style>
+          <a:lnRef idx="1">
+            <a:schemeClr val="accent1"/>
+          </a:lnRef>
+          <a:fillRef idx="3">
+            <a:schemeClr val="accent1"/>
+          </a:fillRef>
+          <a:effectRef idx="2">
+            <a:schemeClr val="accent1"/>
+          </a:effectRef>
+          <a:fontRef idx="minor">
+            <a:schemeClr val="lt1"/>
+          </a:fontRef>
+        </p:style>
+        <p:txBody>
+          <a:bodyPr rtlCol="0" anchor="ctr"/>
+          <a:lstStyle/>
+          <a:p>
+            <a:pPr algn="ctr"/>
+          </a:p>
+        </p:txBody>
+      </p:sp>
+      <p:sp>
+        <p:nvSpPr>
+          <p:cNvPr id="3" name="TextBox 2"/>
+          <p:cNvSpPr txBox="1"/>
+          <p:nvPr/>
+        </p:nvSpPr>
+        <p:spPr>
+          <a:xfrm>
+            <a:off x="822960" y="502920"/>
+            <a:ext cx="10515600" cy="822960"/>
+          </a:xfrm>
+          <a:prstGeom prst="rect">
+            <a:avLst/>
+          </a:prstGeom>
+          <a:noFill/>
+        </p:spPr>
+        <p:txBody>
+          <a:bodyPr wrap="square">
+            <a:spAutoFit/>
+          </a:bodyPr>
+          <a:lstStyle/>
+          <a:p>
+            <a:r>
+              <a:rPr sz="2800" b="1">
+                <a:solidFill>
+                  <a:srgbClr val="2C5F2D"/>
+                </a:solidFill>
+                <a:latin typeface="Cambria"/>
+              </a:rPr>
+              <a:t>Where We Are — the Four Connects</a:t>
+            </a:r>
+          </a:p>
+        </p:txBody>
+      </p:sp>
+      <p:sp>
+        <p:nvSpPr>
+          <p:cNvPr id="5" name="TextBox 4"/>
+          <p:cNvSpPr txBox="1"/>
+          <p:nvPr/>
+        </p:nvSpPr>
+        <p:spPr>
+          <a:xfrm>
+            <a:off x="822960" y="5623560"/>
+            <a:ext cx="10515600" cy="914400"/>
+          </a:xfrm>
+          <a:prstGeom prst="rect">
+            <a:avLst/>
+          </a:prstGeom>
+          <a:noFill/>
+        </p:spPr>
+        <p:txBody>
+          <a:bodyPr wrap="square">
+            <a:spAutoFit/>
+          </a:bodyPr>
+          <a:lstStyle/>
+          <a:p>
+            <a:r>
+              <a:rPr sz="1800" b="0">
+                <a:solidFill>
+                  <a:srgbClr val="222B22"/>
+                </a:solidFill>
+                <a:latin typeface="Calibri"/>
+              </a:rPr>
+              <a:t>Session 10 stands in the third box — </a:t>
+            </a:r>
+            <a:r>
+              <a:rPr sz="1800" b="1">
+                <a:solidFill>
+                  <a:srgbClr val="2C5F2D"/>
+                </a:solidFill>
+                <a:latin typeface="Calibri"/>
+              </a:rPr>
+              <a:t>Connect with God</a:t>
+            </a:r>
+            <a:r>
+              <a:rPr sz="1800" b="0">
+                <a:solidFill>
+                  <a:srgbClr val="222B22"/>
+                </a:solidFill>
+                <a:latin typeface="Calibri"/>
+              </a:rPr>
+              <a:t> — walked again, teen-led. Each connection makes the next one real (Matt. 22:37–40).</a:t>
+            </a:r>
+          </a:p>
+        </p:txBody>
+      </p:sp>
+      <p:sp>
+        <p:nvSpPr>
+          <p:cNvPr id="90" name="SlideNum"/>
+          <p:cNvSpPr txBox="1"/>
+          <p:nvPr/>
+        </p:nvSpPr>
+        <p:spPr>
+          <a:xfrm>
+            <a:off x="11384280" y="6446520"/>
+            <a:ext cx="640080" cy="292608"/>
+          </a:xfrm>
+          <a:prstGeom prst="rect">
+            <a:avLst/>
+          </a:prstGeom>
+          <a:noFill/>
+        </p:spPr>
+        <p:txBody>
+          <a:bodyPr wrap="none" lIns="0" tIns="0" rIns="45720" bIns="0" anchor="ctr"/>
+          <a:lstStyle/>
+          <a:p>
+            <a:pPr algn="r"/>
+            <a:r>
+              <a:t>126a</a:t>
+            </a:r>
+            <a:endParaRPr sz="1000" b="1">
+              <a:solidFill>
+                <a:srgbClr val="7A8A6E"/>
+              </a:solidFill>
+              <a:latin typeface="Calibri"/>
+            </a:endParaRPr>
+          </a:p>
+        </p:txBody>
+      </p:sp>
+      <p:pic>
+        <p:nvPicPr>
+          <p:cNvPr id="91" name="Picture 90" descr="four-connects.png"/>
+          <p:cNvPicPr>
+            <a:picLocks noChangeAspect="1"/>
+          </p:cNvPicPr>
+          <p:nvPr/>
+        </p:nvPicPr>
+        <p:blipFill>
+          <a:blip r:embed="rId4"/>
+          <a:stretch>
+            <a:fillRect/>
+          </a:stretch>
+        </p:blipFill>
+        <p:spPr>
+          <a:xfrm>
+            <a:off x="932688" y="1645920"/>
+            <a:ext cx="10332720" cy="3708663"/>
+          </a:xfrm>
+          <a:prstGeom prst="rect">
+            <a:avLst/>
+          </a:prstGeom>
+        </p:spPr>
+      </p:pic>
+    </p:spTree>
+  </p:cSld>
+  <p:clrMapOvr>
+    <a:masterClrMapping/>
+  </p:clrMapOvr>
+</p:sld>
+</file>
+
+<file path=ppt/slides/slide4.xml><?xml version="1.0" encoding="utf-8"?>
 <p:sld xmlns:a="http://schemas.openxmlformats.org/drawingml/2006/main" xmlns:r="http://schemas.openxmlformats.org/officeDocument/2006/relationships" xmlns:p="http://schemas.openxmlformats.org/presentationml/2006/main">
   <p:cSld>
     <p:spTree>
@@ -7089,7 +7361,7 @@
 </p:sld>
 </file>
 
-<file path=ppt/slides/slide4.xml><?xml version="1.0" encoding="utf-8"?>
+<file path=ppt/slides/slide5.xml><?xml version="1.0" encoding="utf-8"?>
 <p:sld xmlns:a="http://schemas.openxmlformats.org/drawingml/2006/main" xmlns:r="http://schemas.openxmlformats.org/officeDocument/2006/relationships" xmlns:p="http://schemas.openxmlformats.org/presentationml/2006/main">
   <p:cSld>
     <p:spTree>
@@ -7436,7 +7708,7 @@
 </p:sld>
 </file>
 
-<file path=ppt/slides/slide5.xml><?xml version="1.0" encoding="utf-8"?>
+<file path=ppt/slides/slide6.xml><?xml version="1.0" encoding="utf-8"?>
 <p:sld xmlns:a="http://schemas.openxmlformats.org/drawingml/2006/main" xmlns:r="http://schemas.openxmlformats.org/officeDocument/2006/relationships" xmlns:p="http://schemas.openxmlformats.org/presentationml/2006/main">
   <p:cSld>
     <p:spTree>
@@ -7719,333 +7991,6 @@
 </p:sld>
 </file>
 
-<file path=ppt/slides/slide6.xml><?xml version="1.0" encoding="utf-8"?>
-<p:sld xmlns:a="http://schemas.openxmlformats.org/drawingml/2006/main" xmlns:r="http://schemas.openxmlformats.org/officeDocument/2006/relationships" xmlns:p="http://schemas.openxmlformats.org/presentationml/2006/main">
-  <p:cSld>
-    <p:spTree>
-      <p:nvGrpSpPr>
-        <p:cNvPr id="1" name=""/>
-        <p:cNvGrpSpPr/>
-        <p:nvPr/>
-      </p:nvGrpSpPr>
-      <p:grpSpPr>
-        <a:xfrm>
-          <a:off x="0" y="0"/>
-          <a:ext cx="0" cy="0"/>
-          <a:chOff x="0" y="0"/>
-          <a:chExt cx="0" cy="0"/>
-        </a:xfrm>
-      </p:grpSpPr>
-      <p:sp>
-        <p:nvSpPr>
-          <p:cNvPr id="2" name="Rectangle 1"/>
-          <p:cNvSpPr/>
-          <p:nvPr/>
-        </p:nvSpPr>
-        <p:spPr>
-          <a:xfrm>
-            <a:off x="0" y="0"/>
-            <a:ext cx="12191695" cy="6858000"/>
-          </a:xfrm>
-          <a:prstGeom prst="rect">
-            <a:avLst/>
-          </a:prstGeom>
-          <a:solidFill>
-            <a:srgbClr val="FFFFFF"/>
-          </a:solidFill>
-          <a:ln>
-            <a:noFill/>
-          </a:ln>
-        </p:spPr>
-        <p:txBody>
-          <a:bodyPr/>
-          <a:lstStyle/>
-          <a:p>
-            <a:endParaRPr/>
-          </a:p>
-        </p:txBody>
-      </p:sp>
-      <p:sp>
-        <p:nvSpPr>
-          <p:cNvPr id="3" name="TextBox 2"/>
-          <p:cNvSpPr txBox="1"/>
-          <p:nvPr/>
-        </p:nvSpPr>
-        <p:spPr>
-          <a:xfrm>
-            <a:off x="822960" y="502920"/>
-            <a:ext cx="10515600" cy="822960"/>
-          </a:xfrm>
-          <a:prstGeom prst="rect">
-            <a:avLst/>
-          </a:prstGeom>
-          <a:noFill/>
-        </p:spPr>
-        <p:txBody>
-          <a:bodyPr wrap="square">
-            <a:spAutoFit/>
-          </a:bodyPr>
-          <a:lstStyle/>
-          <a:p>
-            <a:pPr algn="l">
-              <a:spcAft>
-                <a:spcPts val="600"/>
-              </a:spcAft>
-            </a:pPr>
-            <a:r>
-              <a:rPr sz="2800" b="1" i="0">
-                <a:solidFill>
-                  <a:srgbClr val="2C5F2D"/>
-                </a:solidFill>
-                <a:latin typeface="Cambria"/>
-              </a:rPr>
-              <a:t>Scripture and Brief Re-Framing</a:t>
-            </a:r>
-          </a:p>
-        </p:txBody>
-      </p:sp>
-      <p:sp>
-        <p:nvSpPr>
-          <p:cNvPr id="4" name="TextBox 4"/>
-          <p:cNvSpPr txBox="1"/>
-          <p:nvPr/>
-        </p:nvSpPr>
-        <p:spPr>
-          <a:xfrm>
-            <a:off x="822960" y="1600200"/>
-            <a:ext cx="5669280" cy="4572000"/>
-          </a:xfrm>
-          <a:prstGeom prst="rect">
-            <a:avLst/>
-          </a:prstGeom>
-          <a:noFill/>
-        </p:spPr>
-        <p:txBody>
-          <a:bodyPr wrap="square" lIns="91440" tIns="91440" rIns="91440" bIns="91440"/>
-          <a:lstStyle/>
-          <a:p>
-            <a:pPr marL="274320" indent="-274320">
-              <a:spcAft>
-                <a:spcPts val="800"/>
-              </a:spcAft>
-            </a:pPr>
-            <a:r>
-              <a:rPr sz="2000" b="1" i="0">
-                <a:solidFill>
-                  <a:srgbClr val="97BC62"/>
-                </a:solidFill>
-                <a:latin typeface="Calibri"/>
-              </a:rPr>
-              <a:t>•  </a:t>
-            </a:r>
-            <a:r>
-              <a:rPr sz="2000" b="0" i="0">
-                <a:solidFill>
-                  <a:srgbClr val="222B22"/>
-                </a:solidFill>
-                <a:latin typeface="Calibri"/>
-              </a:rPr>
-              <a:t>Same two anchors as last week — Psalm 23 and John 15:1–11 — “Listen as if for the first time anyway.”</a:t>
-            </a:r>
-          </a:p>
-          <a:p>
-            <a:pPr marL="274320" indent="-274320">
-              <a:spcAft>
-                <a:spcPts val="800"/>
-              </a:spcAft>
-            </a:pPr>
-            <a:r>
-              <a:rPr sz="2000" b="1" i="0">
-                <a:solidFill>
-                  <a:srgbClr val="97BC62"/>
-                </a:solidFill>
-                <a:latin typeface="Calibri"/>
-              </a:rPr>
-              <a:t>•  </a:t>
-            </a:r>
-            <a:r>
-              <a:rPr sz="2000" b="0" i="0">
-                <a:solidFill>
-                  <a:srgbClr val="222B22"/>
-                </a:solidFill>
-                <a:latin typeface="Calibri"/>
-              </a:rPr>
-              <a:t>A vinedresser does not visit a vine once — abiding is a rhythm, not an event</a:t>
-            </a:r>
-          </a:p>
-          <a:p>
-            <a:pPr marL="274320" indent="-274320">
-              <a:spcAft>
-                <a:spcPts val="800"/>
-              </a:spcAft>
-            </a:pPr>
-            <a:r>
-              <a:rPr sz="2000" b="1" i="0">
-                <a:solidFill>
-                  <a:srgbClr val="97BC62"/>
-                </a:solidFill>
-                <a:latin typeface="Calibri"/>
-              </a:rPr>
-              <a:t>•  </a:t>
-            </a:r>
-            <a:r>
-              <a:rPr sz="2000" b="0" i="0">
-                <a:solidFill>
-                  <a:srgbClr val="222B22"/>
-                </a:solidFill>
-                <a:latin typeface="Calibri"/>
-              </a:rPr>
-              <a:t>Going back changes things — the garden is not a photograph; it is a living place, because your heart is</a:t>
-            </a:r>
-          </a:p>
-          <a:p>
-            <a:pPr marL="274320" indent="-274320">
-              <a:spcAft>
-                <a:spcPts val="800"/>
-              </a:spcAft>
-            </a:pPr>
-            <a:r>
-              <a:rPr sz="2000" b="1" i="0">
-                <a:solidFill>
-                  <a:srgbClr val="97BC62"/>
-                </a:solidFill>
-                <a:latin typeface="Calibri"/>
-              </a:rPr>
-              <a:t>•  </a:t>
-            </a:r>
-            <a:r>
-              <a:rPr sz="2000" b="0" i="0">
-                <a:solidFill>
-                  <a:srgbClr val="222B22"/>
-                </a:solidFill>
-                <a:latin typeface="Calibri"/>
-              </a:rPr>
-              <a:t>A hard garden last week? Going back in tonight is optional — sit and pray instead, fully honored, no explanation owed</a:t>
-            </a:r>
-          </a:p>
-          <a:p>
-            <a:pPr marL="274320" indent="-274320">
-              <a:spcAft>
-                <a:spcPts val="800"/>
-              </a:spcAft>
-            </a:pPr>
-            <a:r>
-              <a:rPr sz="2000" b="1" i="0">
-                <a:solidFill>
-                  <a:srgbClr val="97BC62"/>
-                </a:solidFill>
-                <a:latin typeface="Calibri"/>
-              </a:rPr>
-              <a:t>•  </a:t>
-            </a:r>
-            <a:r>
-              <a:rPr sz="2000" b="0" i="0">
-                <a:solidFill>
-                  <a:srgbClr val="222B22"/>
-                </a:solidFill>
-                <a:latin typeface="Calibri"/>
-              </a:rPr>
-              <a:t>“The words get you to the gate; the silence is where He meets you.”</a:t>
-            </a:r>
-          </a:p>
-        </p:txBody>
-      </p:sp>
-      <p:sp>
-        <p:nvSpPr>
-          <p:cNvPr id="6" name="TextBox 6"/>
-          <p:cNvSpPr txBox="1"/>
-          <p:nvPr/>
-        </p:nvSpPr>
-        <p:spPr>
-          <a:xfrm>
-            <a:off x="6766560" y="1737360"/>
-            <a:ext cx="4663440" cy="2194560"/>
-          </a:xfrm>
-          <a:prstGeom prst="rect">
-            <a:avLst/>
-          </a:prstGeom>
-          <a:solidFill>
-            <a:srgbClr val="F1F6EC"/>
-          </a:solidFill>
-        </p:spPr>
-        <p:txBody>
-          <a:bodyPr wrap="square" lIns="91440" tIns="91440" rIns="91440" bIns="91440" anchor="ctr"/>
-          <a:lstStyle/>
-          <a:p>
-            <a:pPr>
-              <a:spcAft>
-                <a:spcPts val="900"/>
-              </a:spcAft>
-            </a:pPr>
-            <a:r>
-              <a:rPr sz="1200" b="1" i="0">
-                <a:solidFill>
-                  <a:srgbClr val="97BC62"/>
-                </a:solidFill>
-                <a:latin typeface="Calibri"/>
-              </a:rPr>
-              <a:t>PSALM 23:1–3</a:t>
-            </a:r>
-          </a:p>
-          <a:p>
-            <a:pPr>
-              <a:spcAft>
-                <a:spcPts val="600"/>
-              </a:spcAft>
-            </a:pPr>
-            <a:r>
-              <a:rPr sz="2400" b="0" i="1">
-                <a:solidFill>
-                  <a:srgbClr val="222B22"/>
-                </a:solidFill>
-                <a:latin typeface="Cambria"/>
-              </a:rPr>
-              <a:t>“The Lord is my shepherd; I shall not want. He makes me lie down in green pastures. He leads me beside still waters. He restores my soul.”</a:t>
-            </a:r>
-          </a:p>
-        </p:txBody>
-      </p:sp>
-      <p:sp>
-        <p:nvSpPr>
-          <p:cNvPr id="90" name="SlideNum"/>
-          <p:cNvSpPr txBox="1"/>
-          <p:nvPr/>
-        </p:nvSpPr>
-        <p:spPr>
-          <a:xfrm>
-            <a:off x="11384280" y="6446520"/>
-            <a:ext cx="640080" cy="292608"/>
-          </a:xfrm>
-          <a:prstGeom prst="rect">
-            <a:avLst/>
-          </a:prstGeom>
-          <a:noFill/>
-        </p:spPr>
-        <p:txBody>
-          <a:bodyPr wrap="none" lIns="0" tIns="0" rIns="45720" bIns="0" anchor="ctr"/>
-          <a:lstStyle/>
-          <a:p>
-            <a:pPr algn="r"/>
-            <a:r>
-              <a:t>130</a:t>
-            </a:r>
-            <a:endParaRPr sz="1000" b="1">
-              <a:solidFill>
-                <a:srgbClr val="7A8A6E"/>
-              </a:solidFill>
-              <a:latin typeface="Calibri"/>
-            </a:endParaRPr>
-          </a:p>
-        </p:txBody>
-      </p:sp>
-    </p:spTree>
-  </p:cSld>
-  <p:clrMapOvr>
-    <a:masterClrMapping/>
-  </p:clrMapOvr>
-</p:sld>
-</file>
-
 <file path=ppt/slides/slide7.xml><?xml version="1.0" encoding="utf-8"?>
 <p:sld xmlns:a="http://schemas.openxmlformats.org/drawingml/2006/main" xmlns:r="http://schemas.openxmlformats.org/officeDocument/2006/relationships" xmlns:p="http://schemas.openxmlformats.org/presentationml/2006/main">
   <p:cSld>
@@ -8126,6 +8071,333 @@
                 </a:solidFill>
                 <a:latin typeface="Cambria"/>
               </a:rPr>
+              <a:t>Scripture and Brief Re-Framing</a:t>
+            </a:r>
+          </a:p>
+        </p:txBody>
+      </p:sp>
+      <p:sp>
+        <p:nvSpPr>
+          <p:cNvPr id="4" name="TextBox 4"/>
+          <p:cNvSpPr txBox="1"/>
+          <p:nvPr/>
+        </p:nvSpPr>
+        <p:spPr>
+          <a:xfrm>
+            <a:off x="822960" y="1600200"/>
+            <a:ext cx="5669280" cy="4572000"/>
+          </a:xfrm>
+          <a:prstGeom prst="rect">
+            <a:avLst/>
+          </a:prstGeom>
+          <a:noFill/>
+        </p:spPr>
+        <p:txBody>
+          <a:bodyPr wrap="square" lIns="91440" tIns="91440" rIns="91440" bIns="91440"/>
+          <a:lstStyle/>
+          <a:p>
+            <a:pPr marL="274320" indent="-274320">
+              <a:spcAft>
+                <a:spcPts val="800"/>
+              </a:spcAft>
+            </a:pPr>
+            <a:r>
+              <a:rPr sz="2000" b="1" i="0">
+                <a:solidFill>
+                  <a:srgbClr val="97BC62"/>
+                </a:solidFill>
+                <a:latin typeface="Calibri"/>
+              </a:rPr>
+              <a:t>•  </a:t>
+            </a:r>
+            <a:r>
+              <a:rPr sz="2000" b="0" i="0">
+                <a:solidFill>
+                  <a:srgbClr val="222B22"/>
+                </a:solidFill>
+                <a:latin typeface="Calibri"/>
+              </a:rPr>
+              <a:t>Same two anchors as last week — Psalm 23 and John 15:1–11 — “Listen as if for the first time anyway.”</a:t>
+            </a:r>
+          </a:p>
+          <a:p>
+            <a:pPr marL="274320" indent="-274320">
+              <a:spcAft>
+                <a:spcPts val="800"/>
+              </a:spcAft>
+            </a:pPr>
+            <a:r>
+              <a:rPr sz="2000" b="1" i="0">
+                <a:solidFill>
+                  <a:srgbClr val="97BC62"/>
+                </a:solidFill>
+                <a:latin typeface="Calibri"/>
+              </a:rPr>
+              <a:t>•  </a:t>
+            </a:r>
+            <a:r>
+              <a:rPr sz="2000" b="0" i="0">
+                <a:solidFill>
+                  <a:srgbClr val="222B22"/>
+                </a:solidFill>
+                <a:latin typeface="Calibri"/>
+              </a:rPr>
+              <a:t>A vinedresser does not visit a vine once — abiding is a rhythm, not an event</a:t>
+            </a:r>
+          </a:p>
+          <a:p>
+            <a:pPr marL="274320" indent="-274320">
+              <a:spcAft>
+                <a:spcPts val="800"/>
+              </a:spcAft>
+            </a:pPr>
+            <a:r>
+              <a:rPr sz="2000" b="1" i="0">
+                <a:solidFill>
+                  <a:srgbClr val="97BC62"/>
+                </a:solidFill>
+                <a:latin typeface="Calibri"/>
+              </a:rPr>
+              <a:t>•  </a:t>
+            </a:r>
+            <a:r>
+              <a:rPr sz="2000" b="0" i="0">
+                <a:solidFill>
+                  <a:srgbClr val="222B22"/>
+                </a:solidFill>
+                <a:latin typeface="Calibri"/>
+              </a:rPr>
+              <a:t>Going back changes things — the garden is not a photograph; it is a living place, because your heart is</a:t>
+            </a:r>
+          </a:p>
+          <a:p>
+            <a:pPr marL="274320" indent="-274320">
+              <a:spcAft>
+                <a:spcPts val="800"/>
+              </a:spcAft>
+            </a:pPr>
+            <a:r>
+              <a:rPr sz="2000" b="1" i="0">
+                <a:solidFill>
+                  <a:srgbClr val="97BC62"/>
+                </a:solidFill>
+                <a:latin typeface="Calibri"/>
+              </a:rPr>
+              <a:t>•  </a:t>
+            </a:r>
+            <a:r>
+              <a:rPr sz="2000" b="0" i="0">
+                <a:solidFill>
+                  <a:srgbClr val="222B22"/>
+                </a:solidFill>
+                <a:latin typeface="Calibri"/>
+              </a:rPr>
+              <a:t>A hard garden last week? Going back in tonight is optional — sit and pray instead, fully honored, no explanation owed</a:t>
+            </a:r>
+          </a:p>
+          <a:p>
+            <a:pPr marL="274320" indent="-274320">
+              <a:spcAft>
+                <a:spcPts val="800"/>
+              </a:spcAft>
+            </a:pPr>
+            <a:r>
+              <a:rPr sz="2000" b="1" i="0">
+                <a:solidFill>
+                  <a:srgbClr val="97BC62"/>
+                </a:solidFill>
+                <a:latin typeface="Calibri"/>
+              </a:rPr>
+              <a:t>•  </a:t>
+            </a:r>
+            <a:r>
+              <a:rPr sz="2000" b="0" i="0">
+                <a:solidFill>
+                  <a:srgbClr val="222B22"/>
+                </a:solidFill>
+                <a:latin typeface="Calibri"/>
+              </a:rPr>
+              <a:t>“The words get you to the gate; the silence is where He meets you.”</a:t>
+            </a:r>
+          </a:p>
+        </p:txBody>
+      </p:sp>
+      <p:sp>
+        <p:nvSpPr>
+          <p:cNvPr id="6" name="TextBox 6"/>
+          <p:cNvSpPr txBox="1"/>
+          <p:nvPr/>
+        </p:nvSpPr>
+        <p:spPr>
+          <a:xfrm>
+            <a:off x="6766560" y="1737360"/>
+            <a:ext cx="4663440" cy="2194560"/>
+          </a:xfrm>
+          <a:prstGeom prst="rect">
+            <a:avLst/>
+          </a:prstGeom>
+          <a:solidFill>
+            <a:srgbClr val="F1F6EC"/>
+          </a:solidFill>
+        </p:spPr>
+        <p:txBody>
+          <a:bodyPr wrap="square" lIns="91440" tIns="91440" rIns="91440" bIns="91440" anchor="ctr"/>
+          <a:lstStyle/>
+          <a:p>
+            <a:pPr>
+              <a:spcAft>
+                <a:spcPts val="900"/>
+              </a:spcAft>
+            </a:pPr>
+            <a:r>
+              <a:rPr sz="1200" b="1" i="0">
+                <a:solidFill>
+                  <a:srgbClr val="97BC62"/>
+                </a:solidFill>
+                <a:latin typeface="Calibri"/>
+              </a:rPr>
+              <a:t>PSALM 23:1–3</a:t>
+            </a:r>
+          </a:p>
+          <a:p>
+            <a:pPr>
+              <a:spcAft>
+                <a:spcPts val="600"/>
+              </a:spcAft>
+            </a:pPr>
+            <a:r>
+              <a:rPr sz="2400" b="0" i="1">
+                <a:solidFill>
+                  <a:srgbClr val="222B22"/>
+                </a:solidFill>
+                <a:latin typeface="Cambria"/>
+              </a:rPr>
+              <a:t>“The Lord is my shepherd; I shall not want. He makes me lie down in green pastures. He leads me beside still waters. He restores my soul.”</a:t>
+            </a:r>
+          </a:p>
+        </p:txBody>
+      </p:sp>
+      <p:sp>
+        <p:nvSpPr>
+          <p:cNvPr id="90" name="SlideNum"/>
+          <p:cNvSpPr txBox="1"/>
+          <p:nvPr/>
+        </p:nvSpPr>
+        <p:spPr>
+          <a:xfrm>
+            <a:off x="11384280" y="6446520"/>
+            <a:ext cx="640080" cy="292608"/>
+          </a:xfrm>
+          <a:prstGeom prst="rect">
+            <a:avLst/>
+          </a:prstGeom>
+          <a:noFill/>
+        </p:spPr>
+        <p:txBody>
+          <a:bodyPr wrap="none" lIns="0" tIns="0" rIns="45720" bIns="0" anchor="ctr"/>
+          <a:lstStyle/>
+          <a:p>
+            <a:pPr algn="r"/>
+            <a:r>
+              <a:t>130</a:t>
+            </a:r>
+            <a:endParaRPr sz="1000" b="1">
+              <a:solidFill>
+                <a:srgbClr val="7A8A6E"/>
+              </a:solidFill>
+              <a:latin typeface="Calibri"/>
+            </a:endParaRPr>
+          </a:p>
+        </p:txBody>
+      </p:sp>
+    </p:spTree>
+  </p:cSld>
+  <p:clrMapOvr>
+    <a:masterClrMapping/>
+  </p:clrMapOvr>
+</p:sld>
+</file>
+
+<file path=ppt/slides/slide8.xml><?xml version="1.0" encoding="utf-8"?>
+<p:sld xmlns:a="http://schemas.openxmlformats.org/drawingml/2006/main" xmlns:r="http://schemas.openxmlformats.org/officeDocument/2006/relationships" xmlns:p="http://schemas.openxmlformats.org/presentationml/2006/main">
+  <p:cSld>
+    <p:spTree>
+      <p:nvGrpSpPr>
+        <p:cNvPr id="1" name=""/>
+        <p:cNvGrpSpPr/>
+        <p:nvPr/>
+      </p:nvGrpSpPr>
+      <p:grpSpPr>
+        <a:xfrm>
+          <a:off x="0" y="0"/>
+          <a:ext cx="0" cy="0"/>
+          <a:chOff x="0" y="0"/>
+          <a:chExt cx="0" cy="0"/>
+        </a:xfrm>
+      </p:grpSpPr>
+      <p:sp>
+        <p:nvSpPr>
+          <p:cNvPr id="2" name="Rectangle 1"/>
+          <p:cNvSpPr/>
+          <p:nvPr/>
+        </p:nvSpPr>
+        <p:spPr>
+          <a:xfrm>
+            <a:off x="0" y="0"/>
+            <a:ext cx="12191695" cy="6858000"/>
+          </a:xfrm>
+          <a:prstGeom prst="rect">
+            <a:avLst/>
+          </a:prstGeom>
+          <a:solidFill>
+            <a:srgbClr val="FFFFFF"/>
+          </a:solidFill>
+          <a:ln>
+            <a:noFill/>
+          </a:ln>
+        </p:spPr>
+        <p:txBody>
+          <a:bodyPr/>
+          <a:lstStyle/>
+          <a:p>
+            <a:endParaRPr/>
+          </a:p>
+        </p:txBody>
+      </p:sp>
+      <p:sp>
+        <p:nvSpPr>
+          <p:cNvPr id="3" name="TextBox 2"/>
+          <p:cNvSpPr txBox="1"/>
+          <p:nvPr/>
+        </p:nvSpPr>
+        <p:spPr>
+          <a:xfrm>
+            <a:off x="822960" y="502920"/>
+            <a:ext cx="10515600" cy="822960"/>
+          </a:xfrm>
+          <a:prstGeom prst="rect">
+            <a:avLst/>
+          </a:prstGeom>
+          <a:noFill/>
+        </p:spPr>
+        <p:txBody>
+          <a:bodyPr wrap="square">
+            <a:spAutoFit/>
+          </a:bodyPr>
+          <a:lstStyle/>
+          <a:p>
+            <a:pPr algn="l">
+              <a:spcAft>
+                <a:spcPts val="600"/>
+              </a:spcAft>
+            </a:pPr>
+            <a:r>
+              <a:rPr sz="2800" b="1" i="0">
+                <a:solidFill>
+                  <a:srgbClr val="2C5F2D"/>
+                </a:solidFill>
+                <a:latin typeface="Cambria"/>
+              </a:rPr>
               <a:t>Bridge to the Exercise</a:t>
             </a:r>
           </a:p>
@@ -8293,7 +8565,7 @@
 </p:sld>
 </file>
 
-<file path=ppt/slides/slide8.xml><?xml version="1.0" encoding="utf-8"?>
+<file path=ppt/slides/slide9.xml><?xml version="1.0" encoding="utf-8"?>
 <p:sld xmlns:a="http://schemas.openxmlformats.org/drawingml/2006/main" xmlns:r="http://schemas.openxmlformats.org/officeDocument/2006/relationships" xmlns:p="http://schemas.openxmlformats.org/presentationml/2006/main">
   <p:cSld>
     <p:spTree>
@@ -8618,278 +8890,6 @@
           </a:effectLst>
         </p:spPr>
       </p:pic>
-    </p:spTree>
-  </p:cSld>
-  <p:clrMapOvr>
-    <a:masterClrMapping/>
-  </p:clrMapOvr>
-</p:sld>
-</file>
-
-<file path=ppt/slides/slide9.xml><?xml version="1.0" encoding="utf-8"?>
-<p:sld xmlns:a="http://schemas.openxmlformats.org/drawingml/2006/main" xmlns:r="http://schemas.openxmlformats.org/officeDocument/2006/relationships" xmlns:p="http://schemas.openxmlformats.org/presentationml/2006/main">
-  <p:cSld>
-    <p:spTree>
-      <p:nvGrpSpPr>
-        <p:cNvPr id="1" name=""/>
-        <p:cNvGrpSpPr/>
-        <p:nvPr/>
-      </p:nvGrpSpPr>
-      <p:grpSpPr>
-        <a:xfrm>
-          <a:off x="0" y="0"/>
-          <a:ext cx="0" cy="0"/>
-          <a:chOff x="0" y="0"/>
-          <a:chExt cx="0" cy="0"/>
-        </a:xfrm>
-      </p:grpSpPr>
-      <p:sp>
-        <p:nvSpPr>
-          <p:cNvPr id="2" name="Rectangle 1"/>
-          <p:cNvSpPr/>
-          <p:nvPr/>
-        </p:nvSpPr>
-        <p:spPr>
-          <a:xfrm>
-            <a:off x="0" y="0"/>
-            <a:ext cx="12191695" cy="6858000"/>
-          </a:xfrm>
-          <a:prstGeom prst="rect">
-            <a:avLst/>
-          </a:prstGeom>
-          <a:solidFill>
-            <a:srgbClr val="FFFFFF"/>
-          </a:solidFill>
-          <a:ln>
-            <a:noFill/>
-          </a:ln>
-        </p:spPr>
-        <p:txBody>
-          <a:bodyPr/>
-          <a:lstStyle/>
-          <a:p>
-            <a:endParaRPr/>
-          </a:p>
-        </p:txBody>
-      </p:sp>
-      <p:sp>
-        <p:nvSpPr>
-          <p:cNvPr id="3" name="TextBox 2"/>
-          <p:cNvSpPr txBox="1"/>
-          <p:nvPr/>
-        </p:nvSpPr>
-        <p:spPr>
-          <a:xfrm>
-            <a:off x="822960" y="502920"/>
-            <a:ext cx="10515600" cy="822960"/>
-          </a:xfrm>
-          <a:prstGeom prst="rect">
-            <a:avLst/>
-          </a:prstGeom>
-          <a:noFill/>
-        </p:spPr>
-        <p:txBody>
-          <a:bodyPr wrap="square">
-            <a:spAutoFit/>
-          </a:bodyPr>
-          <a:lstStyle/>
-          <a:p>
-            <a:pPr algn="l">
-              <a:spcAft>
-                <a:spcPts val="600"/>
-              </a:spcAft>
-            </a:pPr>
-            <a:r>
-              <a:rPr sz="2800" b="1" i="0">
-                <a:solidFill>
-                  <a:srgbClr val="2C5F2D"/>
-                </a:solidFill>
-                <a:latin typeface="Cambria"/>
-              </a:rPr>
-              <a:t>Merge and One-Word Landing</a:t>
-            </a:r>
-          </a:p>
-        </p:txBody>
-      </p:sp>
-      <p:sp>
-        <p:nvSpPr>
-          <p:cNvPr id="4" name="TextBox 4"/>
-          <p:cNvSpPr txBox="1"/>
-          <p:nvPr/>
-        </p:nvSpPr>
-        <p:spPr>
-          <a:xfrm>
-            <a:off x="822960" y="1554480"/>
-            <a:ext cx="10515600" cy="4892040"/>
-          </a:xfrm>
-          <a:prstGeom prst="rect">
-            <a:avLst/>
-          </a:prstGeom>
-          <a:noFill/>
-        </p:spPr>
-        <p:txBody>
-          <a:bodyPr wrap="square" lIns="91440" tIns="91440" rIns="91440" bIns="91440"/>
-          <a:lstStyle/>
-          <a:p>
-            <a:pPr marL="274320" indent="-274320">
-              <a:spcAft>
-                <a:spcPts val="900"/>
-              </a:spcAft>
-            </a:pPr>
-            <a:r>
-              <a:rPr sz="2800" b="1" i="0">
-                <a:solidFill>
-                  <a:srgbClr val="97BC62"/>
-                </a:solidFill>
-                <a:latin typeface="Calibri"/>
-              </a:rPr>
-              <a:t>•  </a:t>
-            </a:r>
-            <a:r>
-              <a:rPr sz="2800" b="0" i="0">
-                <a:solidFill>
-                  <a:srgbClr val="222B22"/>
-                </a:solidFill>
-                <a:latin typeface="Calibri"/>
-              </a:rPr>
-              <a:t>“What happened in your pair stays in your pair.”</a:t>
-            </a:r>
-          </a:p>
-          <a:p>
-            <a:pPr marL="274320" indent="-274320">
-              <a:spcAft>
-                <a:spcPts val="900"/>
-              </a:spcAft>
-            </a:pPr>
-            <a:r>
-              <a:rPr sz="2800" b="1" i="0">
-                <a:solidFill>
-                  <a:srgbClr val="97BC62"/>
-                </a:solidFill>
-                <a:latin typeface="Calibri"/>
-              </a:rPr>
-              <a:t>•  </a:t>
-            </a:r>
-            <a:r>
-              <a:rPr sz="2800" b="0" i="0">
-                <a:solidFill>
-                  <a:srgbClr val="222B22"/>
-                </a:solidFill>
-                <a:latin typeface="Calibri"/>
-              </a:rPr>
-              <a:t>One word each, when you’re ready — not what was said, but what you noticed; you can pass</a:t>
-            </a:r>
-          </a:p>
-          <a:p>
-            <a:pPr marL="685800" indent="-274320">
-              <a:spcAft>
-                <a:spcPts val="700"/>
-              </a:spcAft>
-            </a:pPr>
-            <a:r>
-              <a:rPr sz="2000" b="1" i="0">
-                <a:solidFill>
-                  <a:srgbClr val="97BC62"/>
-                </a:solidFill>
-                <a:latin typeface="Calibri"/>
-              </a:rPr>
-              <a:t>–  </a:t>
-            </a:r>
-            <a:r>
-              <a:rPr sz="2000" b="0" i="1">
-                <a:solidFill>
-                  <a:srgbClr val="222B22"/>
-                </a:solidFill>
-                <a:latin typeface="Calibri"/>
-              </a:rPr>
-              <a:t>“Deeper.” “Same.” “Tender.” “Quiet.” “Harder.” “Found.”</a:t>
-            </a:r>
-          </a:p>
-          <a:p>
-            <a:pPr marL="274320" indent="-274320">
-              <a:spcAft>
-                <a:spcPts val="900"/>
-              </a:spcAft>
-            </a:pPr>
-            <a:r>
-              <a:rPr sz="2800" b="1" i="0">
-                <a:solidFill>
-                  <a:srgbClr val="97BC62"/>
-                </a:solidFill>
-                <a:latin typeface="Calibri"/>
-              </a:rPr>
-              <a:t>•  </a:t>
-            </a:r>
-            <a:r>
-              <a:rPr sz="2800" b="0" i="0">
-                <a:solidFill>
-                  <a:srgbClr val="222B22"/>
-                </a:solidFill>
-                <a:latin typeface="Calibri"/>
-              </a:rPr>
-              <a:t>A parent offers the first word — each one received without commentary</a:t>
-            </a:r>
-          </a:p>
-          <a:p>
-            <a:pPr marL="274320" indent="-274320">
-              <a:spcAft>
-                <a:spcPts val="900"/>
-              </a:spcAft>
-            </a:pPr>
-            <a:r>
-              <a:rPr sz="2800" b="1" i="0">
-                <a:solidFill>
-                  <a:srgbClr val="97BC62"/>
-                </a:solidFill>
-                <a:latin typeface="Calibri"/>
-              </a:rPr>
-              <a:t>•  </a:t>
-            </a:r>
-            <a:r>
-              <a:rPr sz="2800" b="0" i="0">
-                <a:solidFill>
-                  <a:srgbClr val="222B22"/>
-                </a:solidFill>
-                <a:latin typeface="Calibri"/>
-              </a:rPr>
-              <a:t>“A garden visited twice is a garden being tended. Whatever He is doing in yours, He will keep doing it this week.”</a:t>
-            </a:r>
-          </a:p>
-        </p:txBody>
-      </p:sp>
-      <p:sp>
-        <p:nvSpPr>
-          <p:cNvPr id="90" name="SlideNum"/>
-          <p:cNvSpPr txBox="1"/>
-          <p:nvPr/>
-        </p:nvSpPr>
-        <p:spPr>
-          <a:xfrm>
-            <a:off x="11384280" y="6446520"/>
-            <a:ext cx="640080" cy="292608"/>
-          </a:xfrm>
-          <a:prstGeom prst="rect">
-            <a:avLst/>
-          </a:prstGeom>
-          <a:noFill/>
-        </p:spPr>
-        <p:txBody>
-          <a:bodyPr wrap="none" lIns="0" tIns="0" rIns="45720" bIns="0" anchor="ctr"/>
-          <a:lstStyle/>
-          <a:p>
-            <a:pPr algn="r"/>
-            <a:r>
-              <a:t>133</a:t>
-            </a:r>
-            <a:endParaRPr sz="1000" b="1">
-              <a:solidFill>
-                <a:srgbClr val="7A8A6E"/>
-              </a:solidFill>
-              <a:latin typeface="Calibri"/>
-            </a:endParaRPr>
-          </a:p>
-        </p:txBody>
-      </p:sp>
     </p:spTree>
   </p:cSld>
   <p:clrMapOvr>

--- a/_implementation-notes/evening-series/FotH Evening Session 10 Slides DRAFT v1.pptx
+++ b/_implementation-notes/evening-series/FotH Evening Session 10 Slides DRAFT v1.pptx
@@ -6912,7 +6912,7 @@
           <p:nvPr/>
         </p:nvPicPr>
         <p:blipFill>
-          <a:blip r:embed="rId4"/>
+          <a:blip r:embed="rId5"/>
           <a:stretch>
             <a:fillRect/>
           </a:stretch>

--- a/_implementation-notes/evening-series/FotH Evening Session 10 Slides DRAFT v1.pptx
+++ b/_implementation-notes/evening-series/FotH Evening Session 10 Slides DRAFT v1.pptx
@@ -5028,7 +5028,7 @@
           <a:p>
             <a:pPr algn="r"/>
             <a:r>
-              <a:t>133</a:t>
+              <a:t>152</a:t>
             </a:r>
             <a:endParaRPr sz="1000" b="1">
               <a:solidFill>
@@ -5300,7 +5300,7 @@
           <a:p>
             <a:pPr algn="r"/>
             <a:r>
-              <a:t>134</a:t>
+              <a:t>153</a:t>
             </a:r>
             <a:endParaRPr sz="1000" b="1">
               <a:solidFill>
@@ -5528,7 +5528,7 @@
           <a:p>
             <a:pPr algn="r"/>
             <a:r>
-              <a:t>135</a:t>
+              <a:t>154</a:t>
             </a:r>
             <a:endParaRPr sz="1000" b="1">
               <a:solidFill>
@@ -5720,7 +5720,7 @@
           <a:p>
             <a:pPr algn="r"/>
             <a:r>
-              <a:t>135a</a:t>
+              <a:t>155</a:t>
             </a:r>
             <a:endParaRPr sz="1000" b="1">
               <a:solidFill>
@@ -6017,7 +6017,7 @@
           <a:p>
             <a:pPr algn="r"/>
             <a:r>
-              <a:t>136</a:t>
+              <a:t>156</a:t>
             </a:r>
             <a:endParaRPr sz="1000" b="1">
               <a:solidFill>
@@ -6462,7 +6462,7 @@
           <a:p>
             <a:pPr algn="r"/>
             <a:r>
-              <a:t>137</a:t>
+              <a:t>157</a:t>
             </a:r>
             <a:endParaRPr sz="1000" b="1">
               <a:solidFill>
@@ -6711,7 +6711,7 @@
           <a:p>
             <a:pPr algn="r"/>
             <a:r>
-              <a:t>126</a:t>
+              <a:t>144</a:t>
             </a:r>
             <a:endParaRPr sz="1000" b="1">
               <a:solidFill>
@@ -6892,7 +6892,7 @@
           <a:p>
             <a:pPr algn="r"/>
             <a:r>
-              <a:t>126a</a:t>
+              <a:t>145</a:t>
             </a:r>
             <a:endParaRPr sz="1000" b="1">
               <a:solidFill>
@@ -7306,7 +7306,7 @@
           <a:p>
             <a:pPr algn="r"/>
             <a:r>
-              <a:t>127</a:t>
+              <a:t>146</a:t>
             </a:r>
             <a:endParaRPr sz="1000" b="1">
               <a:solidFill>
@@ -7689,7 +7689,7 @@
           <a:p>
             <a:pPr algn="r"/>
             <a:r>
-              <a:t>128</a:t>
+              <a:t>147</a:t>
             </a:r>
             <a:endParaRPr sz="1000" b="1">
               <a:solidFill>
@@ -7936,7 +7936,7 @@
           <a:p>
             <a:pPr algn="r"/>
             <a:r>
-              <a:t>129</a:t>
+              <a:t>148</a:t>
             </a:r>
             <a:endParaRPr sz="1000" b="1">
               <a:solidFill>
@@ -8299,7 +8299,7 @@
           <a:p>
             <a:pPr algn="r"/>
             <a:r>
-              <a:t>130</a:t>
+              <a:t>149</a:t>
             </a:r>
             <a:endParaRPr sz="1000" b="1">
               <a:solidFill>
@@ -8546,7 +8546,7 @@
           <a:p>
             <a:pPr algn="r"/>
             <a:r>
-              <a:t>131</a:t>
+              <a:t>150</a:t>
             </a:r>
             <a:endParaRPr sz="1000" b="1">
               <a:solidFill>
@@ -8843,7 +8843,7 @@
           <a:p>
             <a:pPr algn="r"/>
             <a:r>
-              <a:t>132</a:t>
+              <a:t>151</a:t>
             </a:r>
             <a:endParaRPr sz="1000" b="1">
               <a:solidFill>

--- a/_implementation-notes/evening-series/FotH Evening Session 10 Slides DRAFT v1.pptx
+++ b/_implementation-notes/evening-series/FotH Evening Session 10 Slides DRAFT v1.pptx
@@ -6912,7 +6912,7 @@
           <p:nvPr/>
         </p:nvPicPr>
         <p:blipFill>
-          <a:blip r:embed="rId5"/>
+          <a:blip r:embed="rId6"/>
           <a:stretch>
             <a:fillRect/>
           </a:stretch>

--- a/_implementation-notes/evening-series/FotH Evening Session 10 Slides DRAFT v1.pptx
+++ b/_implementation-notes/evening-series/FotH Evening Session 10 Slides DRAFT v1.pptx
@@ -1178,7 +1178,7 @@
           <a:p>
             <a:r>
               <a:rPr lang="en-US" sz="1200"/>
-              <a:t>S10 · 8:13–8:20 · LEAD: CONTENT PRESENTER</a:t>
+              <a:t>S10 · 8:13–8:20 · LEAD: CONTAINER HOLDER</a:t>
             </a:r>
           </a:p>
           <a:p>

--- a/_implementation-notes/evening-series/FotH Evening Session 10 Slides DRAFT v1.pptx
+++ b/_implementation-notes/evening-series/FotH Evening Session 10 Slides DRAFT v1.pptx
@@ -5028,7 +5028,7 @@
           <a:p>
             <a:pPr algn="r"/>
             <a:r>
-              <a:t>152</a:t>
+              <a:t>153</a:t>
             </a:r>
             <a:endParaRPr sz="1000" b="1">
               <a:solidFill>
@@ -5300,7 +5300,7 @@
           <a:p>
             <a:pPr algn="r"/>
             <a:r>
-              <a:t>153</a:t>
+              <a:t>154</a:t>
             </a:r>
             <a:endParaRPr sz="1000" b="1">
               <a:solidFill>
@@ -5528,7 +5528,7 @@
           <a:p>
             <a:pPr algn="r"/>
             <a:r>
-              <a:t>154</a:t>
+              <a:t>155</a:t>
             </a:r>
             <a:endParaRPr sz="1000" b="1">
               <a:solidFill>
@@ -5720,7 +5720,7 @@
           <a:p>
             <a:pPr algn="r"/>
             <a:r>
-              <a:t>155</a:t>
+              <a:t>156</a:t>
             </a:r>
             <a:endParaRPr sz="1000" b="1">
               <a:solidFill>
@@ -6017,7 +6017,7 @@
           <a:p>
             <a:pPr algn="r"/>
             <a:r>
-              <a:t>156</a:t>
+              <a:t>157</a:t>
             </a:r>
             <a:endParaRPr sz="1000" b="1">
               <a:solidFill>
@@ -6462,7 +6462,7 @@
           <a:p>
             <a:pPr algn="r"/>
             <a:r>
-              <a:t>157</a:t>
+              <a:t>158</a:t>
             </a:r>
             <a:endParaRPr sz="1000" b="1">
               <a:solidFill>
@@ -6711,7 +6711,7 @@
           <a:p>
             <a:pPr algn="r"/>
             <a:r>
-              <a:t>144</a:t>
+              <a:t>145</a:t>
             </a:r>
             <a:endParaRPr sz="1000" b="1">
               <a:solidFill>
@@ -6892,7 +6892,7 @@
           <a:p>
             <a:pPr algn="r"/>
             <a:r>
-              <a:t>145</a:t>
+              <a:t>146</a:t>
             </a:r>
             <a:endParaRPr sz="1000" b="1">
               <a:solidFill>
@@ -7306,7 +7306,7 @@
           <a:p>
             <a:pPr algn="r"/>
             <a:r>
-              <a:t>146</a:t>
+              <a:t>147</a:t>
             </a:r>
             <a:endParaRPr sz="1000" b="1">
               <a:solidFill>
@@ -7689,7 +7689,7 @@
           <a:p>
             <a:pPr algn="r"/>
             <a:r>
-              <a:t>147</a:t>
+              <a:t>148</a:t>
             </a:r>
             <a:endParaRPr sz="1000" b="1">
               <a:solidFill>
@@ -7936,7 +7936,7 @@
           <a:p>
             <a:pPr algn="r"/>
             <a:r>
-              <a:t>148</a:t>
+              <a:t>149</a:t>
             </a:r>
             <a:endParaRPr sz="1000" b="1">
               <a:solidFill>
@@ -8299,7 +8299,7 @@
           <a:p>
             <a:pPr algn="r"/>
             <a:r>
-              <a:t>149</a:t>
+              <a:t>150</a:t>
             </a:r>
             <a:endParaRPr sz="1000" b="1">
               <a:solidFill>
@@ -8546,7 +8546,7 @@
           <a:p>
             <a:pPr algn="r"/>
             <a:r>
-              <a:t>150</a:t>
+              <a:t>151</a:t>
             </a:r>
             <a:endParaRPr sz="1000" b="1">
               <a:solidFill>
@@ -8843,7 +8843,7 @@
           <a:p>
             <a:pPr algn="r"/>
             <a:r>
-              <a:t>151</a:t>
+              <a:t>152</a:t>
             </a:r>
             <a:endParaRPr sz="1000" b="1">
               <a:solidFill>

--- a/_implementation-notes/evening-series/FotH Evening Session 10 Slides DRAFT v1.pptx
+++ b/_implementation-notes/evening-series/FotH Evening Session 10 Slides DRAFT v1.pptx
@@ -1342,20 +1342,22 @@
           <a:lstStyle/>
           <a:p>
             <a:r>
-              <a:rPr lang="en-US" sz="1200"/>
               <a:t>S10 · 8:28–8:30 · LEAD: CONTAINER HOLDER</a:t>
             </a:r>
           </a:p>
           <a:p>
             <a:r>
-              <a:rPr lang="en-US" sz="1200"/>
               <a:t>BEATS: 1. What happened in your pair is yours; carry it gently — no car-ride debrief unless the heart is fully ready. 2. If something heavy surfaced, reach out — the team is walking with you. 3. Aaronic blessing, hands up.</a:t>
             </a:r>
           </a:p>
           <a:p>
             <a:r>
-              <a:rPr lang="en-US" sz="1200"/>
               <a:t>CUES: Stay accessible fifteen minutes after; two-adult rule for any teen. Afterward, a brief specific word of thanks to the senior, separate from the feedback round — leading deep water for the first time costs something; name that it was seen.</a:t>
+            </a:r>
+          </a:p>
+          <a:p>
+            <a:r>
+              <a:t>BLESSINGS: eyes on the person, not the screen — nothing to read; say what is on your heart for them, specific and short.</a:t>
             </a:r>
           </a:p>
         </p:txBody>
@@ -6323,7 +6325,7 @@
                 </a:solidFill>
                 <a:latin typeface="Calibri"/>
               </a:rPr>
-              <a:t>Blessings — specific, witnessed, short</a:t>
+              <a:t>Blessings — eyes on the person, not the screen: say what is on your heart for them. Specific, witnessed, short</a:t>
             </a:r>
           </a:p>
           <a:p>
